--- a/linear_algebra/2-scalar-vector-matrix/eigenVector_eigenValue-2-Application.pptx
+++ b/linear_algebra/2-scalar-vector-matrix/eigenVector_eigenValue-2-Application.pptx
@@ -5,21 +5,24 @@
     <p:sldMasterId id="2147483648" r:id="rId1"/>
   </p:sldMasterIdLst>
   <p:notesMasterIdLst>
-    <p:notesMasterId r:id="rId11"/>
+    <p:notesMasterId r:id="rId14"/>
   </p:notesMasterIdLst>
   <p:handoutMasterIdLst>
-    <p:handoutMasterId r:id="rId12"/>
+    <p:handoutMasterId r:id="rId15"/>
   </p:handoutMasterIdLst>
   <p:sldIdLst>
     <p:sldId id="298" r:id="rId2"/>
     <p:sldId id="277" r:id="rId3"/>
     <p:sldId id="299" r:id="rId4"/>
     <p:sldId id="279" r:id="rId5"/>
-    <p:sldId id="276" r:id="rId6"/>
-    <p:sldId id="281" r:id="rId7"/>
-    <p:sldId id="280" r:id="rId8"/>
-    <p:sldId id="282" r:id="rId9"/>
-    <p:sldId id="296" r:id="rId10"/>
+    <p:sldId id="300" r:id="rId6"/>
+    <p:sldId id="276" r:id="rId7"/>
+    <p:sldId id="281" r:id="rId8"/>
+    <p:sldId id="301" r:id="rId9"/>
+    <p:sldId id="280" r:id="rId10"/>
+    <p:sldId id="302" r:id="rId11"/>
+    <p:sldId id="282" r:id="rId12"/>
+    <p:sldId id="296" r:id="rId13"/>
   </p:sldIdLst>
   <p:sldSz cx="12192000" cy="6858000"/>
   <p:notesSz cx="6858000" cy="9144000"/>
@@ -223,7 +226,7 @@
           <a:p>
             <a:fld id="{7BAEECA8-D063-486F-AE31-5020270C1449}" type="datetimeFigureOut">
               <a:rPr lang="en-US" smtClean="0"/>
-              <a:t>10/27/2025</a:t>
+              <a:t>2/22/2026</a:t>
             </a:fld>
             <a:endParaRPr lang="en-US"/>
           </a:p>
@@ -640,7 +643,7 @@
           <a:p>
             <a:fld id="{CB233BD1-3BA8-448D-9D08-7846095EA517}" type="datetimeFigureOut">
               <a:rPr lang="en-US" smtClean="0"/>
-              <a:t>10/27/2025</a:t>
+              <a:t>2/22/2026</a:t>
             </a:fld>
             <a:endParaRPr lang="en-US"/>
           </a:p>
@@ -1054,7 +1057,7 @@
           <a:p>
             <a:fld id="{6383FAE1-13DE-4511-8C1B-C8AFB720664C}" type="datetimeFigureOut">
               <a:rPr lang="en-US" smtClean="0"/>
-              <a:t>10/27/2025</a:t>
+              <a:t>2/22/2026</a:t>
             </a:fld>
             <a:endParaRPr lang="en-US"/>
           </a:p>
@@ -1252,7 +1255,7 @@
           <a:p>
             <a:fld id="{6383FAE1-13DE-4511-8C1B-C8AFB720664C}" type="datetimeFigureOut">
               <a:rPr lang="en-US" smtClean="0"/>
-              <a:t>10/27/2025</a:t>
+              <a:t>2/22/2026</a:t>
             </a:fld>
             <a:endParaRPr lang="en-US"/>
           </a:p>
@@ -1460,7 +1463,7 @@
           <a:p>
             <a:fld id="{6383FAE1-13DE-4511-8C1B-C8AFB720664C}" type="datetimeFigureOut">
               <a:rPr lang="en-US" smtClean="0"/>
-              <a:t>10/27/2025</a:t>
+              <a:t>2/22/2026</a:t>
             </a:fld>
             <a:endParaRPr lang="en-US"/>
           </a:p>
@@ -1658,7 +1661,7 @@
           <a:p>
             <a:fld id="{6383FAE1-13DE-4511-8C1B-C8AFB720664C}" type="datetimeFigureOut">
               <a:rPr lang="en-US" smtClean="0"/>
-              <a:t>10/27/2025</a:t>
+              <a:t>2/22/2026</a:t>
             </a:fld>
             <a:endParaRPr lang="en-US"/>
           </a:p>
@@ -1933,7 +1936,7 @@
           <a:p>
             <a:fld id="{6383FAE1-13DE-4511-8C1B-C8AFB720664C}" type="datetimeFigureOut">
               <a:rPr lang="en-US" smtClean="0"/>
-              <a:t>10/27/2025</a:t>
+              <a:t>2/22/2026</a:t>
             </a:fld>
             <a:endParaRPr lang="en-US"/>
           </a:p>
@@ -2198,7 +2201,7 @@
           <a:p>
             <a:fld id="{6383FAE1-13DE-4511-8C1B-C8AFB720664C}" type="datetimeFigureOut">
               <a:rPr lang="en-US" smtClean="0"/>
-              <a:t>10/27/2025</a:t>
+              <a:t>2/22/2026</a:t>
             </a:fld>
             <a:endParaRPr lang="en-US"/>
           </a:p>
@@ -2610,7 +2613,7 @@
           <a:p>
             <a:fld id="{6383FAE1-13DE-4511-8C1B-C8AFB720664C}" type="datetimeFigureOut">
               <a:rPr lang="en-US" smtClean="0"/>
-              <a:t>10/27/2025</a:t>
+              <a:t>2/22/2026</a:t>
             </a:fld>
             <a:endParaRPr lang="en-US"/>
           </a:p>
@@ -2751,7 +2754,7 @@
           <a:p>
             <a:fld id="{6383FAE1-13DE-4511-8C1B-C8AFB720664C}" type="datetimeFigureOut">
               <a:rPr lang="en-US" smtClean="0"/>
-              <a:t>10/27/2025</a:t>
+              <a:t>2/22/2026</a:t>
             </a:fld>
             <a:endParaRPr lang="en-US"/>
           </a:p>
@@ -2864,7 +2867,7 @@
           <a:p>
             <a:fld id="{6383FAE1-13DE-4511-8C1B-C8AFB720664C}" type="datetimeFigureOut">
               <a:rPr lang="en-US" smtClean="0"/>
-              <a:t>10/27/2025</a:t>
+              <a:t>2/22/2026</a:t>
             </a:fld>
             <a:endParaRPr lang="en-US"/>
           </a:p>
@@ -3175,7 +3178,7 @@
           <a:p>
             <a:fld id="{6383FAE1-13DE-4511-8C1B-C8AFB720664C}" type="datetimeFigureOut">
               <a:rPr lang="en-US" smtClean="0"/>
-              <a:t>10/27/2025</a:t>
+              <a:t>2/22/2026</a:t>
             </a:fld>
             <a:endParaRPr lang="en-US"/>
           </a:p>
@@ -3466,7 +3469,7 @@
           <a:p>
             <a:fld id="{6383FAE1-13DE-4511-8C1B-C8AFB720664C}" type="datetimeFigureOut">
               <a:rPr lang="en-US" smtClean="0"/>
-              <a:t>10/27/2025</a:t>
+              <a:t>2/22/2026</a:t>
             </a:fld>
             <a:endParaRPr lang="en-US"/>
           </a:p>
@@ -3710,7 +3713,7 @@
           <a:p>
             <a:fld id="{6383FAE1-13DE-4511-8C1B-C8AFB720664C}" type="datetimeFigureOut">
               <a:rPr lang="en-US" smtClean="0"/>
-              <a:t>10/27/2025</a:t>
+              <a:t>2/22/2026</a:t>
             </a:fld>
             <a:endParaRPr lang="en-US"/>
           </a:p>
@@ -4311,6 +4314,564 @@
 </p:sld>
 </file>
 
+<file path=ppt/slides/slide10.xml><?xml version="1.0" encoding="utf-8"?>
+<p:sld xmlns:a="http://schemas.openxmlformats.org/drawingml/2006/main" xmlns:r="http://schemas.openxmlformats.org/officeDocument/2006/relationships" xmlns:p="http://schemas.openxmlformats.org/presentationml/2006/main">
+  <p:cSld>
+    <p:spTree>
+      <p:nvGrpSpPr>
+        <p:cNvPr id="1" name="">
+          <a:extLst>
+            <a:ext uri="{FF2B5EF4-FFF2-40B4-BE49-F238E27FC236}">
+              <a16:creationId xmlns:a16="http://schemas.microsoft.com/office/drawing/2014/main" id="{9D36C09B-4E91-400C-FC7B-5E58B0D4016E}"/>
+            </a:ext>
+          </a:extLst>
+        </p:cNvPr>
+        <p:cNvGrpSpPr/>
+        <p:nvPr/>
+      </p:nvGrpSpPr>
+      <p:grpSpPr>
+        <a:xfrm>
+          <a:off x="0" y="0"/>
+          <a:ext cx="0" cy="0"/>
+          <a:chOff x="0" y="0"/>
+          <a:chExt cx="0" cy="0"/>
+        </a:xfrm>
+      </p:grpSpPr>
+      <p:sp>
+        <p:nvSpPr>
+          <p:cNvPr id="4" name="Title 1">
+            <a:extLst>
+              <a:ext uri="{FF2B5EF4-FFF2-40B4-BE49-F238E27FC236}">
+                <a16:creationId xmlns:a16="http://schemas.microsoft.com/office/drawing/2014/main" id="{ABE735AC-995B-E646-AE0B-40ECBFFD3EE9}"/>
+              </a:ext>
+            </a:extLst>
+          </p:cNvPr>
+          <p:cNvSpPr>
+            <a:spLocks noGrp="1"/>
+          </p:cNvSpPr>
+          <p:nvPr>
+            <p:ph type="title"/>
+          </p:nvPr>
+        </p:nvSpPr>
+        <p:spPr>
+          <a:xfrm>
+            <a:off x="838200" y="160938"/>
+            <a:ext cx="10515600" cy="345089"/>
+          </a:xfrm>
+        </p:spPr>
+        <p:txBody>
+          <a:bodyPr>
+            <a:normAutofit fontScale="90000"/>
+          </a:bodyPr>
+          <a:lstStyle/>
+          <a:p>
+            <a:r>
+              <a:rPr lang="en-US" dirty="0"/>
+              <a:t>Eigen value and E. vector (Application)</a:t>
+            </a:r>
+            <a:endParaRPr lang="en-IN" dirty="0"/>
+          </a:p>
+        </p:txBody>
+      </p:sp>
+      <p:sp>
+        <p:nvSpPr>
+          <p:cNvPr id="7" name="TextBox 6">
+            <a:extLst>
+              <a:ext uri="{FF2B5EF4-FFF2-40B4-BE49-F238E27FC236}">
+                <a16:creationId xmlns:a16="http://schemas.microsoft.com/office/drawing/2014/main" id="{2ECEE9D7-E337-EBD8-3D1A-E4F3B8003CEB}"/>
+              </a:ext>
+            </a:extLst>
+          </p:cNvPr>
+          <p:cNvSpPr txBox="1"/>
+          <p:nvPr/>
+        </p:nvSpPr>
+        <p:spPr>
+          <a:xfrm>
+            <a:off x="695325" y="671275"/>
+            <a:ext cx="11410950" cy="2677656"/>
+          </a:xfrm>
+          <a:prstGeom prst="rect">
+            <a:avLst/>
+          </a:prstGeom>
+          <a:noFill/>
+        </p:spPr>
+        <p:txBody>
+          <a:bodyPr wrap="square">
+            <a:spAutoFit/>
+          </a:bodyPr>
+          <a:lstStyle/>
+          <a:p>
+            <a:r>
+              <a:rPr lang="en-US" sz="2400" b="1" dirty="0">
+                <a:solidFill>
+                  <a:schemeClr val="accent6">
+                    <a:lumMod val="60000"/>
+                    <a:lumOff val="40000"/>
+                  </a:schemeClr>
+                </a:solidFill>
+              </a:rPr>
+              <a:t>Markov Chains &amp; PageRank:</a:t>
+            </a:r>
+          </a:p>
+          <a:p>
+            <a:endParaRPr lang="en-US" sz="2400" b="1" dirty="0">
+              <a:solidFill>
+                <a:schemeClr val="accent6">
+                  <a:lumMod val="60000"/>
+                  <a:lumOff val="40000"/>
+                </a:schemeClr>
+              </a:solidFill>
+            </a:endParaRPr>
+          </a:p>
+          <a:p>
+            <a:r>
+              <a:rPr lang="en-US" sz="2400" dirty="0">
+                <a:solidFill>
+                  <a:schemeClr val="accent6">
+                    <a:lumMod val="60000"/>
+                    <a:lumOff val="40000"/>
+                  </a:schemeClr>
+                </a:solidFill>
+              </a:rPr>
+              <a:t>In Google’s </a:t>
+            </a:r>
+            <a:r>
+              <a:rPr lang="en-US" sz="2400" b="1" dirty="0">
+                <a:solidFill>
+                  <a:schemeClr val="accent6">
+                    <a:lumMod val="60000"/>
+                    <a:lumOff val="40000"/>
+                  </a:schemeClr>
+                </a:solidFill>
+              </a:rPr>
+              <a:t>PageRank algorithm</a:t>
+            </a:r>
+            <a:r>
+              <a:rPr lang="en-US" sz="2400" dirty="0">
+                <a:solidFill>
+                  <a:schemeClr val="accent6">
+                    <a:lumMod val="60000"/>
+                    <a:lumOff val="40000"/>
+                  </a:schemeClr>
+                </a:solidFill>
+              </a:rPr>
+              <a:t>, the steady-state probabilities (importance of web pages) come from the </a:t>
+            </a:r>
+            <a:r>
+              <a:rPr lang="en-US" sz="2400" b="1" dirty="0">
+                <a:solidFill>
+                  <a:schemeClr val="accent6">
+                    <a:lumMod val="60000"/>
+                    <a:lumOff val="40000"/>
+                  </a:schemeClr>
+                </a:solidFill>
+              </a:rPr>
+              <a:t>dominant eigenvector</a:t>
+            </a:r>
+            <a:r>
+              <a:rPr lang="en-US" sz="2400" dirty="0">
+                <a:solidFill>
+                  <a:schemeClr val="accent6">
+                    <a:lumMod val="60000"/>
+                    <a:lumOff val="40000"/>
+                  </a:schemeClr>
+                </a:solidFill>
+              </a:rPr>
+              <a:t> of a transition matrix.</a:t>
+            </a:r>
+          </a:p>
+          <a:p>
+            <a:r>
+              <a:rPr lang="en-US" sz="2400" dirty="0">
+                <a:solidFill>
+                  <a:schemeClr val="accent6">
+                    <a:lumMod val="60000"/>
+                    <a:lumOff val="40000"/>
+                  </a:schemeClr>
+                </a:solidFill>
+              </a:rPr>
+              <a:t>Eigenvalue = 1 corresponds to the stationary distribution.</a:t>
+            </a:r>
+          </a:p>
+          <a:p>
+            <a:pPr marL="0" indent="0">
+              <a:buNone/>
+            </a:pPr>
+            <a:endParaRPr lang="en-US" sz="2400" dirty="0">
+              <a:solidFill>
+                <a:schemeClr val="accent6">
+                  <a:lumMod val="60000"/>
+                  <a:lumOff val="40000"/>
+                </a:schemeClr>
+              </a:solidFill>
+            </a:endParaRPr>
+          </a:p>
+          <a:p>
+            <a:pPr marL="0" indent="0">
+              <a:buNone/>
+            </a:pPr>
+            <a:endParaRPr lang="en-US" sz="2400" dirty="0">
+              <a:solidFill>
+                <a:schemeClr val="accent6">
+                  <a:lumMod val="60000"/>
+                  <a:lumOff val="40000"/>
+                </a:schemeClr>
+              </a:solidFill>
+            </a:endParaRPr>
+          </a:p>
+        </p:txBody>
+      </p:sp>
+    </p:spTree>
+    <p:extLst>
+      <p:ext uri="{BB962C8B-B14F-4D97-AF65-F5344CB8AC3E}">
+        <p14:creationId xmlns:p14="http://schemas.microsoft.com/office/powerpoint/2010/main" val="2199148094"/>
+      </p:ext>
+    </p:extLst>
+  </p:cSld>
+  <p:clrMapOvr>
+    <a:masterClrMapping/>
+  </p:clrMapOvr>
+</p:sld>
+</file>
+
+<file path=ppt/slides/slide11.xml><?xml version="1.0" encoding="utf-8"?>
+<p:sld xmlns:a="http://schemas.openxmlformats.org/drawingml/2006/main" xmlns:r="http://schemas.openxmlformats.org/officeDocument/2006/relationships" xmlns:p="http://schemas.openxmlformats.org/presentationml/2006/main">
+  <p:cSld>
+    <p:spTree>
+      <p:nvGrpSpPr>
+        <p:cNvPr id="1" name="">
+          <a:extLst>
+            <a:ext uri="{FF2B5EF4-FFF2-40B4-BE49-F238E27FC236}">
+              <a16:creationId xmlns:a16="http://schemas.microsoft.com/office/drawing/2014/main" id="{8CEA1B8B-56E2-9F59-6314-94D0435E8E64}"/>
+            </a:ext>
+          </a:extLst>
+        </p:cNvPr>
+        <p:cNvGrpSpPr/>
+        <p:nvPr/>
+      </p:nvGrpSpPr>
+      <p:grpSpPr>
+        <a:xfrm>
+          <a:off x="0" y="0"/>
+          <a:ext cx="0" cy="0"/>
+          <a:chOff x="0" y="0"/>
+          <a:chExt cx="0" cy="0"/>
+        </a:xfrm>
+      </p:grpSpPr>
+      <p:sp>
+        <p:nvSpPr>
+          <p:cNvPr id="4" name="Title 1">
+            <a:extLst>
+              <a:ext uri="{FF2B5EF4-FFF2-40B4-BE49-F238E27FC236}">
+                <a16:creationId xmlns:a16="http://schemas.microsoft.com/office/drawing/2014/main" id="{8BC4C1F8-DA9F-C8D2-E04D-0F20B22FCD53}"/>
+              </a:ext>
+            </a:extLst>
+          </p:cNvPr>
+          <p:cNvSpPr>
+            <a:spLocks noGrp="1"/>
+          </p:cNvSpPr>
+          <p:nvPr>
+            <p:ph type="title"/>
+          </p:nvPr>
+        </p:nvSpPr>
+        <p:spPr>
+          <a:xfrm>
+            <a:off x="838200" y="160938"/>
+            <a:ext cx="10515600" cy="345089"/>
+          </a:xfrm>
+        </p:spPr>
+        <p:txBody>
+          <a:bodyPr>
+            <a:normAutofit fontScale="90000"/>
+          </a:bodyPr>
+          <a:lstStyle/>
+          <a:p>
+            <a:r>
+              <a:rPr lang="en-US" dirty="0"/>
+              <a:t>Eigen value and E. vector (Application)</a:t>
+            </a:r>
+            <a:endParaRPr lang="en-IN" dirty="0"/>
+          </a:p>
+        </p:txBody>
+      </p:sp>
+      <p:sp>
+        <p:nvSpPr>
+          <p:cNvPr id="7" name="TextBox 6">
+            <a:extLst>
+              <a:ext uri="{FF2B5EF4-FFF2-40B4-BE49-F238E27FC236}">
+                <a16:creationId xmlns:a16="http://schemas.microsoft.com/office/drawing/2014/main" id="{FDA92F45-186A-4B34-39D5-C6F23D033427}"/>
+              </a:ext>
+            </a:extLst>
+          </p:cNvPr>
+          <p:cNvSpPr txBox="1"/>
+          <p:nvPr/>
+        </p:nvSpPr>
+        <p:spPr>
+          <a:xfrm>
+            <a:off x="338328" y="671275"/>
+            <a:ext cx="11596497" cy="4154984"/>
+          </a:xfrm>
+          <a:prstGeom prst="rect">
+            <a:avLst/>
+          </a:prstGeom>
+          <a:noFill/>
+        </p:spPr>
+        <p:txBody>
+          <a:bodyPr wrap="square">
+            <a:spAutoFit/>
+          </a:bodyPr>
+          <a:lstStyle/>
+          <a:p>
+            <a:r>
+              <a:rPr lang="en-US" sz="2400" b="1" dirty="0">
+                <a:solidFill>
+                  <a:schemeClr val="accent6">
+                    <a:lumMod val="60000"/>
+                    <a:lumOff val="40000"/>
+                  </a:schemeClr>
+                </a:solidFill>
+              </a:rPr>
+              <a:t>Neural Networks &amp; Optimization:</a:t>
+            </a:r>
+          </a:p>
+          <a:p>
+            <a:endParaRPr lang="en-US" sz="2400" b="1" dirty="0">
+              <a:solidFill>
+                <a:schemeClr val="accent6">
+                  <a:lumMod val="60000"/>
+                  <a:lumOff val="40000"/>
+                </a:schemeClr>
+              </a:solidFill>
+            </a:endParaRPr>
+          </a:p>
+          <a:p>
+            <a:r>
+              <a:rPr lang="en-US" sz="2400" b="1" dirty="0">
+                <a:solidFill>
+                  <a:schemeClr val="accent6">
+                    <a:lumMod val="60000"/>
+                    <a:lumOff val="40000"/>
+                  </a:schemeClr>
+                </a:solidFill>
+              </a:rPr>
+              <a:t>Hessian matrix</a:t>
+            </a:r>
+            <a:r>
+              <a:rPr lang="en-US" sz="2400" dirty="0">
+                <a:solidFill>
+                  <a:schemeClr val="accent6">
+                    <a:lumMod val="60000"/>
+                    <a:lumOff val="40000"/>
+                  </a:schemeClr>
+                </a:solidFill>
+              </a:rPr>
+              <a:t> (second derivative of loss function) has eigenvalues/eigenvectors that tell you:</a:t>
+            </a:r>
+          </a:p>
+          <a:p>
+            <a:pPr lvl="1"/>
+            <a:r>
+              <a:rPr lang="en-US" sz="2400" dirty="0">
+                <a:solidFill>
+                  <a:schemeClr val="accent6">
+                    <a:lumMod val="60000"/>
+                    <a:lumOff val="40000"/>
+                  </a:schemeClr>
+                </a:solidFill>
+              </a:rPr>
+              <a:t>Eigenvectors → directions in parameter space</a:t>
+            </a:r>
+          </a:p>
+          <a:p>
+            <a:pPr lvl="1"/>
+            <a:r>
+              <a:rPr lang="en-US" sz="2400" dirty="0">
+                <a:solidFill>
+                  <a:schemeClr val="accent6">
+                    <a:lumMod val="60000"/>
+                    <a:lumOff val="40000"/>
+                  </a:schemeClr>
+                </a:solidFill>
+              </a:rPr>
+              <a:t>Eigenvalues → curvature (how steep/flat the loss surface is)</a:t>
+            </a:r>
+          </a:p>
+          <a:p>
+            <a:pPr lvl="1"/>
+            <a:endParaRPr lang="en-US" sz="2400" dirty="0">
+              <a:solidFill>
+                <a:schemeClr val="accent6">
+                  <a:lumMod val="60000"/>
+                  <a:lumOff val="40000"/>
+                </a:schemeClr>
+              </a:solidFill>
+            </a:endParaRPr>
+          </a:p>
+          <a:p>
+            <a:r>
+              <a:rPr lang="en-US" sz="2400" dirty="0">
+                <a:solidFill>
+                  <a:schemeClr val="accent6">
+                    <a:lumMod val="60000"/>
+                    <a:lumOff val="40000"/>
+                  </a:schemeClr>
+                </a:solidFill>
+              </a:rPr>
+              <a:t>Used in understanding:</a:t>
+            </a:r>
+          </a:p>
+          <a:p>
+            <a:pPr lvl="1"/>
+            <a:r>
+              <a:rPr lang="en-US" sz="2400" b="1" dirty="0">
+                <a:solidFill>
+                  <a:schemeClr val="accent6">
+                    <a:lumMod val="60000"/>
+                    <a:lumOff val="40000"/>
+                  </a:schemeClr>
+                </a:solidFill>
+              </a:rPr>
+              <a:t>Convergence speed</a:t>
+            </a:r>
+            <a:endParaRPr lang="en-US" sz="2400" dirty="0">
+              <a:solidFill>
+                <a:schemeClr val="accent6">
+                  <a:lumMod val="60000"/>
+                  <a:lumOff val="40000"/>
+                </a:schemeClr>
+              </a:solidFill>
+            </a:endParaRPr>
+          </a:p>
+          <a:p>
+            <a:pPr lvl="1"/>
+            <a:r>
+              <a:rPr lang="en-US" sz="2400" b="1" dirty="0">
+                <a:solidFill>
+                  <a:schemeClr val="accent6">
+                    <a:lumMod val="60000"/>
+                    <a:lumOff val="40000"/>
+                  </a:schemeClr>
+                </a:solidFill>
+              </a:rPr>
+              <a:t>Stability of gradient descent</a:t>
+            </a:r>
+            <a:endParaRPr lang="en-US" sz="2400" dirty="0">
+              <a:solidFill>
+                <a:schemeClr val="accent6">
+                  <a:lumMod val="60000"/>
+                  <a:lumOff val="40000"/>
+                </a:schemeClr>
+              </a:solidFill>
+            </a:endParaRPr>
+          </a:p>
+          <a:p>
+            <a:pPr lvl="1"/>
+            <a:r>
+              <a:rPr lang="en-US" sz="2400" b="1" dirty="0">
+                <a:solidFill>
+                  <a:schemeClr val="accent6">
+                    <a:lumMod val="60000"/>
+                    <a:lumOff val="40000"/>
+                  </a:schemeClr>
+                </a:solidFill>
+              </a:rPr>
+              <a:t>Flat minima vs sharp minima</a:t>
+            </a:r>
+            <a:endParaRPr lang="en-US" sz="2400" dirty="0">
+              <a:solidFill>
+                <a:schemeClr val="accent6">
+                  <a:lumMod val="60000"/>
+                  <a:lumOff val="40000"/>
+                </a:schemeClr>
+              </a:solidFill>
+            </a:endParaRPr>
+          </a:p>
+        </p:txBody>
+      </p:sp>
+    </p:spTree>
+    <p:extLst>
+      <p:ext uri="{BB962C8B-B14F-4D97-AF65-F5344CB8AC3E}">
+        <p14:creationId xmlns:p14="http://schemas.microsoft.com/office/powerpoint/2010/main" val="3262251411"/>
+      </p:ext>
+    </p:extLst>
+  </p:cSld>
+  <p:clrMapOvr>
+    <a:masterClrMapping/>
+  </p:clrMapOvr>
+</p:sld>
+</file>
+
+<file path=ppt/slides/slide12.xml><?xml version="1.0" encoding="utf-8"?>
+<p:sld xmlns:a="http://schemas.openxmlformats.org/drawingml/2006/main" xmlns:r="http://schemas.openxmlformats.org/officeDocument/2006/relationships" xmlns:p="http://schemas.openxmlformats.org/presentationml/2006/main">
+  <p:cSld>
+    <p:spTree>
+      <p:nvGrpSpPr>
+        <p:cNvPr id="1" name="">
+          <a:extLst>
+            <a:ext uri="{FF2B5EF4-FFF2-40B4-BE49-F238E27FC236}">
+              <a16:creationId xmlns:a16="http://schemas.microsoft.com/office/drawing/2014/main" id="{752D0FEC-425B-E8D9-ADB9-BC9BEF8978E5}"/>
+            </a:ext>
+          </a:extLst>
+        </p:cNvPr>
+        <p:cNvGrpSpPr/>
+        <p:nvPr/>
+      </p:nvGrpSpPr>
+      <p:grpSpPr>
+        <a:xfrm>
+          <a:off x="0" y="0"/>
+          <a:ext cx="0" cy="0"/>
+          <a:chOff x="0" y="0"/>
+          <a:chExt cx="0" cy="0"/>
+        </a:xfrm>
+      </p:grpSpPr>
+      <p:sp>
+        <p:nvSpPr>
+          <p:cNvPr id="2" name="Title 1">
+            <a:extLst>
+              <a:ext uri="{FF2B5EF4-FFF2-40B4-BE49-F238E27FC236}">
+                <a16:creationId xmlns:a16="http://schemas.microsoft.com/office/drawing/2014/main" id="{C6B3EA16-ABB7-9CF7-571F-F4C4B379EB9A}"/>
+              </a:ext>
+            </a:extLst>
+          </p:cNvPr>
+          <p:cNvSpPr>
+            <a:spLocks noGrp="1"/>
+          </p:cNvSpPr>
+          <p:nvPr>
+            <p:ph type="title"/>
+          </p:nvPr>
+        </p:nvSpPr>
+        <p:spPr>
+          <a:xfrm>
+            <a:off x="838200" y="54229"/>
+            <a:ext cx="10515600" cy="393827"/>
+          </a:xfrm>
+        </p:spPr>
+        <p:txBody>
+          <a:bodyPr>
+            <a:normAutofit fontScale="90000"/>
+          </a:bodyPr>
+          <a:lstStyle/>
+          <a:p>
+            <a:pPr algn="ctr"/>
+            <a:r>
+              <a:rPr lang="en-US" sz="3200" b="1" dirty="0"/>
+              <a:t>STOP</a:t>
+            </a:r>
+          </a:p>
+        </p:txBody>
+      </p:sp>
+    </p:spTree>
+    <p:extLst>
+      <p:ext uri="{BB962C8B-B14F-4D97-AF65-F5344CB8AC3E}">
+        <p14:creationId xmlns:p14="http://schemas.microsoft.com/office/powerpoint/2010/main" val="1649105850"/>
+      </p:ext>
+    </p:extLst>
+  </p:cSld>
+  <p:clrMapOvr>
+    <a:masterClrMapping/>
+  </p:clrMapOvr>
+</p:sld>
+</file>
+
 <file path=ppt/slides/slide2.xml><?xml version="1.0" encoding="utf-8"?>
 <p:sld xmlns:a="http://schemas.openxmlformats.org/drawingml/2006/main" xmlns:r="http://schemas.openxmlformats.org/officeDocument/2006/relationships" xmlns:p="http://schemas.openxmlformats.org/presentationml/2006/main">
   <p:cSld>
@@ -4392,8 +4953,8 @@
         </p:nvSpPr>
         <p:spPr>
           <a:xfrm>
-            <a:off x="26633" y="708746"/>
-            <a:ext cx="4287915" cy="3108543"/>
+            <a:off x="81497" y="708746"/>
+            <a:ext cx="11860567" cy="1938992"/>
           </a:xfrm>
           <a:prstGeom prst="rect">
             <a:avLst/>
@@ -4406,7 +4967,7 @@
           <a:lstStyle/>
           <a:p>
             <a:r>
-              <a:rPr lang="en-US" sz="1400" dirty="0">
+              <a:rPr lang="en-US" sz="2400" dirty="0">
                 <a:solidFill>
                   <a:schemeClr val="accent6">
                     <a:lumMod val="60000"/>
@@ -4417,7 +4978,7 @@
               <a:t>The eigenvectors are the </a:t>
             </a:r>
             <a:r>
-              <a:rPr lang="en-US" sz="1400" b="1" dirty="0">
+              <a:rPr lang="en-US" sz="2400" b="1" dirty="0">
                 <a:solidFill>
                   <a:schemeClr val="accent6">
                     <a:lumMod val="60000"/>
@@ -4428,7 +4989,7 @@
               <a:t>principal directions</a:t>
             </a:r>
             <a:r>
-              <a:rPr lang="en-US" sz="1400" dirty="0">
+              <a:rPr lang="en-US" sz="2400" dirty="0">
                 <a:solidFill>
                   <a:schemeClr val="accent6">
                     <a:lumMod val="60000"/>
@@ -4441,7 +5002,7 @@
           </a:p>
           <a:p>
             <a:r>
-              <a:rPr lang="en-US" sz="1400" dirty="0">
+              <a:rPr lang="en-US" sz="2400" dirty="0">
                 <a:solidFill>
                   <a:schemeClr val="accent6">
                     <a:lumMod val="60000"/>
@@ -4454,7 +5015,7 @@
           </a:p>
           <a:p>
             <a:r>
-              <a:rPr lang="en-US" sz="1400" dirty="0">
+              <a:rPr lang="en-US" sz="2400" dirty="0">
                 <a:solidFill>
                   <a:schemeClr val="accent6">
                     <a:lumMod val="60000"/>
@@ -4467,7 +5028,7 @@
           </a:p>
           <a:p>
             <a:r>
-              <a:rPr lang="en-US" sz="1400" dirty="0">
+              <a:rPr lang="en-US" sz="2400" dirty="0">
                 <a:solidFill>
                   <a:schemeClr val="accent6">
                     <a:lumMod val="60000"/>
@@ -4476,68 +5037,6 @@
                 </a:solidFill>
               </a:rPr>
               <a:t>- Second eigenvalue → orthogonal direction → 2nd principal component</a:t>
-            </a:r>
-          </a:p>
-          <a:p>
-            <a:endParaRPr lang="en-US" sz="1400" dirty="0">
-              <a:solidFill>
-                <a:schemeClr val="accent6">
-                  <a:lumMod val="60000"/>
-                  <a:lumOff val="40000"/>
-                </a:schemeClr>
-              </a:solidFill>
-            </a:endParaRPr>
-          </a:p>
-          <a:p>
-            <a:r>
-              <a:rPr lang="en-US" sz="1400" dirty="0">
-                <a:solidFill>
-                  <a:schemeClr val="accent6">
-                    <a:lumMod val="60000"/>
-                    <a:lumOff val="40000"/>
-                  </a:schemeClr>
-                </a:solidFill>
-              </a:rPr>
-              <a:t>Eigenvalues + eigenvectors = tools to find patterns and reduce dimensions while preserving structure of data.</a:t>
-            </a:r>
-          </a:p>
-          <a:p>
-            <a:r>
-              <a:rPr lang="en-US" sz="1400" dirty="0">
-                <a:solidFill>
-                  <a:schemeClr val="accent6">
-                    <a:lumMod val="60000"/>
-                    <a:lumOff val="40000"/>
-                  </a:schemeClr>
-                </a:solidFill>
-              </a:rPr>
-              <a:t>In PCA:</a:t>
-            </a:r>
-          </a:p>
-          <a:p>
-            <a:r>
-              <a:rPr lang="en-US" sz="1400" dirty="0">
-                <a:solidFill>
-                  <a:schemeClr val="accent6">
-                    <a:lumMod val="60000"/>
-                    <a:lumOff val="40000"/>
-                  </a:schemeClr>
-                </a:solidFill>
-              </a:rPr>
-              <a:t>Eigenvectors → directions of maximum spread</a:t>
-            </a:r>
-          </a:p>
-          <a:p>
-            <a:r>
-              <a:rPr lang="en-US" sz="1400" dirty="0">
-                <a:solidFill>
-                  <a:schemeClr val="accent6">
-                    <a:lumMod val="60000"/>
-                    <a:lumOff val="40000"/>
-                  </a:schemeClr>
-                </a:solidFill>
-              </a:rPr>
-              <a:t>Eigenvalues → how much spread in those directions</a:t>
             </a:r>
           </a:p>
         </p:txBody>
@@ -4986,6 +5485,130 @@
           </p:pic>
         </mc:Fallback>
       </mc:AlternateContent>
+      <p:sp>
+        <p:nvSpPr>
+          <p:cNvPr id="6" name="TextBox 5">
+            <a:extLst>
+              <a:ext uri="{FF2B5EF4-FFF2-40B4-BE49-F238E27FC236}">
+                <a16:creationId xmlns:a16="http://schemas.microsoft.com/office/drawing/2014/main" id="{E2C9301E-7878-DB05-99A8-7C36C46FB2AD}"/>
+              </a:ext>
+            </a:extLst>
+          </p:cNvPr>
+          <p:cNvSpPr txBox="1"/>
+          <p:nvPr/>
+        </p:nvSpPr>
+        <p:spPr>
+          <a:xfrm>
+            <a:off x="32004" y="2926741"/>
+            <a:ext cx="4771322" cy="2862322"/>
+          </a:xfrm>
+          <a:prstGeom prst="rect">
+            <a:avLst/>
+          </a:prstGeom>
+          <a:noFill/>
+        </p:spPr>
+        <p:txBody>
+          <a:bodyPr wrap="square">
+            <a:spAutoFit/>
+          </a:bodyPr>
+          <a:lstStyle/>
+          <a:p>
+            <a:endParaRPr lang="en-US" dirty="0">
+              <a:solidFill>
+                <a:schemeClr val="accent6">
+                  <a:lumMod val="60000"/>
+                  <a:lumOff val="40000"/>
+                </a:schemeClr>
+              </a:solidFill>
+            </a:endParaRPr>
+          </a:p>
+          <a:p>
+            <a:r>
+              <a:rPr lang="en-US" dirty="0">
+                <a:solidFill>
+                  <a:schemeClr val="accent6">
+                    <a:lumMod val="60000"/>
+                    <a:lumOff val="40000"/>
+                  </a:schemeClr>
+                </a:solidFill>
+              </a:rPr>
+              <a:t>Eigenvalues + eigenvectors = tools to find patterns and reduce dimensions while </a:t>
+            </a:r>
+          </a:p>
+          <a:p>
+            <a:r>
+              <a:rPr lang="en-US" dirty="0">
+                <a:solidFill>
+                  <a:schemeClr val="accent6">
+                    <a:lumMod val="60000"/>
+                    <a:lumOff val="40000"/>
+                  </a:schemeClr>
+                </a:solidFill>
+              </a:rPr>
+              <a:t>preserving structure of data.</a:t>
+            </a:r>
+          </a:p>
+          <a:p>
+            <a:endParaRPr lang="en-US" dirty="0">
+              <a:solidFill>
+                <a:schemeClr val="accent6">
+                  <a:lumMod val="60000"/>
+                  <a:lumOff val="40000"/>
+                </a:schemeClr>
+              </a:solidFill>
+            </a:endParaRPr>
+          </a:p>
+          <a:p>
+            <a:r>
+              <a:rPr lang="en-US" dirty="0">
+                <a:solidFill>
+                  <a:schemeClr val="accent6">
+                    <a:lumMod val="60000"/>
+                    <a:lumOff val="40000"/>
+                  </a:schemeClr>
+                </a:solidFill>
+              </a:rPr>
+              <a:t>In PCA:</a:t>
+            </a:r>
+          </a:p>
+          <a:p>
+            <a:r>
+              <a:rPr lang="en-US" dirty="0">
+                <a:solidFill>
+                  <a:schemeClr val="accent6">
+                    <a:lumMod val="60000"/>
+                    <a:lumOff val="40000"/>
+                  </a:schemeClr>
+                </a:solidFill>
+              </a:rPr>
+              <a:t>Eigenvectors → directions of maximum spread</a:t>
+            </a:r>
+          </a:p>
+          <a:p>
+            <a:endParaRPr lang="en-US" dirty="0">
+              <a:solidFill>
+                <a:schemeClr val="accent6">
+                  <a:lumMod val="60000"/>
+                  <a:lumOff val="40000"/>
+                </a:schemeClr>
+              </a:solidFill>
+            </a:endParaRPr>
+          </a:p>
+          <a:p>
+            <a:r>
+              <a:rPr lang="en-US" dirty="0">
+                <a:solidFill>
+                  <a:schemeClr val="accent6">
+                    <a:lumMod val="60000"/>
+                    <a:lumOff val="40000"/>
+                  </a:schemeClr>
+                </a:solidFill>
+              </a:rPr>
+              <a:t>Eigenvalues → how much spread in those directions</a:t>
+            </a:r>
+          </a:p>
+        </p:txBody>
+      </p:sp>
     </p:spTree>
     <p:extLst>
       <p:ext uri="{BB962C8B-B14F-4D97-AF65-F5344CB8AC3E}">
@@ -5080,8 +5703,8 @@
         </p:nvSpPr>
         <p:spPr>
           <a:xfrm>
-            <a:off x="704850" y="1305342"/>
-            <a:ext cx="11125200" cy="4247317"/>
+            <a:off x="128016" y="720126"/>
+            <a:ext cx="11702034" cy="5632311"/>
           </a:xfrm>
           <a:prstGeom prst="rect">
             <a:avLst/>
@@ -5098,7 +5721,7 @@
               <a:buNone/>
             </a:pPr>
             <a:r>
-              <a:rPr lang="en-US" dirty="0">
+              <a:rPr lang="en-US" sz="2400" dirty="0">
                 <a:solidFill>
                   <a:schemeClr val="accent6">
                     <a:lumMod val="60000"/>
@@ -5109,7 +5732,7 @@
               <a:t>Principal components are new variables that are constructed as linear combinations or mixtures of the initial variables. PC represent the directions of the data that explain a </a:t>
             </a:r>
             <a:r>
-              <a:rPr lang="en-US" b="1" dirty="0">
+              <a:rPr lang="en-US" sz="2400" b="1" dirty="0">
                 <a:solidFill>
                   <a:schemeClr val="accent6">
                     <a:lumMod val="60000"/>
@@ -5120,7 +5743,7 @@
               <a:t>maximal amount of variance</a:t>
             </a:r>
             <a:r>
-              <a:rPr lang="en-US" dirty="0">
+              <a:rPr lang="en-US" sz="2400" dirty="0">
                 <a:solidFill>
                   <a:schemeClr val="accent6">
                     <a:lumMod val="60000"/>
@@ -5135,71 +5758,7 @@
             <a:pPr marL="0" indent="0">
               <a:buNone/>
             </a:pPr>
-            <a:r>
-              <a:rPr lang="en-US" dirty="0">
-                <a:solidFill>
-                  <a:schemeClr val="accent6">
-                    <a:lumMod val="60000"/>
-                    <a:lumOff val="40000"/>
-                  </a:schemeClr>
-                </a:solidFill>
-              </a:rPr>
-              <a:t>Follow 5 steps to create PCA: </a:t>
-            </a:r>
-          </a:p>
-          <a:p>
-            <a:pPr marL="0" indent="0">
-              <a:buNone/>
-            </a:pPr>
-            <a:r>
-              <a:rPr lang="en-US" b="1" dirty="0">
-                <a:solidFill>
-                  <a:schemeClr val="accent6">
-                    <a:lumMod val="60000"/>
-                    <a:lumOff val="40000"/>
-                  </a:schemeClr>
-                </a:solidFill>
-              </a:rPr>
-              <a:t>Step 1: Standardization: </a:t>
-            </a:r>
-          </a:p>
-          <a:p>
-            <a:pPr marL="0" indent="0">
-              <a:buNone/>
-            </a:pPr>
-            <a:r>
-              <a:rPr lang="en-US" dirty="0">
-                <a:solidFill>
-                  <a:schemeClr val="accent6">
-                    <a:lumMod val="60000"/>
-                    <a:lumOff val="40000"/>
-                  </a:schemeClr>
-                </a:solidFill>
-              </a:rPr>
-              <a:t>Why do we do this ? </a:t>
-            </a:r>
-          </a:p>
-          <a:p>
-            <a:pPr marL="0" indent="0">
-              <a:buNone/>
-            </a:pPr>
-            <a:r>
-              <a:rPr lang="en-US" dirty="0">
-                <a:solidFill>
-                  <a:schemeClr val="accent6">
-                    <a:lumMod val="60000"/>
-                    <a:lumOff val="40000"/>
-                  </a:schemeClr>
-                </a:solidFill>
-              </a:rPr>
-              <a:t>If your features are on different scales (e.g., one feature ranges 0–1, another 0–1000), PCA will give more importance to features with larger magnitudes or variances.</a:t>
-            </a:r>
-          </a:p>
-          <a:p>
-            <a:pPr marL="0" indent="0">
-              <a:buNone/>
-            </a:pPr>
-            <a:endParaRPr lang="en-US" b="1" dirty="0">
+            <a:endParaRPr lang="en-US" sz="2400" dirty="0">
               <a:solidFill>
                 <a:schemeClr val="accent6">
                   <a:lumMod val="60000"/>
@@ -5209,10 +5768,74 @@
             </a:endParaRPr>
           </a:p>
           <a:p>
+            <a:pPr marL="0" indent="0" algn="ctr">
+              <a:buNone/>
+            </a:pPr>
+            <a:r>
+              <a:rPr lang="en-US" sz="2400" dirty="0">
+                <a:solidFill>
+                  <a:schemeClr val="accent6">
+                    <a:lumMod val="60000"/>
+                    <a:lumOff val="40000"/>
+                  </a:schemeClr>
+                </a:solidFill>
+              </a:rPr>
+              <a:t>Follow 5 steps to create PCA</a:t>
+            </a:r>
+          </a:p>
+          <a:p>
             <a:pPr marL="0" indent="0">
               <a:buNone/>
             </a:pPr>
-            <a:endParaRPr lang="en-US" b="1" dirty="0">
+            <a:r>
+              <a:rPr lang="en-US" sz="2400" b="1" dirty="0">
+                <a:solidFill>
+                  <a:schemeClr val="accent6">
+                    <a:lumMod val="60000"/>
+                    <a:lumOff val="40000"/>
+                  </a:schemeClr>
+                </a:solidFill>
+              </a:rPr>
+              <a:t>Step 1: Standardization: </a:t>
+            </a:r>
+          </a:p>
+          <a:p>
+            <a:pPr marL="0" indent="0">
+              <a:buNone/>
+            </a:pPr>
+            <a:r>
+              <a:rPr lang="en-US" sz="2400" dirty="0">
+                <a:solidFill>
+                  <a:schemeClr val="accent6">
+                    <a:lumMod val="60000"/>
+                    <a:lumOff val="40000"/>
+                  </a:schemeClr>
+                </a:solidFill>
+              </a:rPr>
+              <a:t>Why do we do this ? </a:t>
+            </a:r>
+          </a:p>
+          <a:p>
+            <a:pPr marL="0" indent="0">
+              <a:buNone/>
+            </a:pPr>
+            <a:r>
+              <a:rPr lang="en-US" sz="2400" dirty="0">
+                <a:solidFill>
+                  <a:schemeClr val="accent6">
+                    <a:lumMod val="60000"/>
+                    <a:lumOff val="40000"/>
+                  </a:schemeClr>
+                </a:solidFill>
+              </a:rPr>
+              <a:t>If your features are on different scales (e.g., one feature ranges 0–1, another 0–1000), PCA will give more importance to features with larger magnitudes or variances.</a:t>
+            </a:r>
+          </a:p>
+          <a:p>
+            <a:pPr marL="0" indent="0">
+              <a:buNone/>
+            </a:pPr>
+            <a:endParaRPr lang="en-US" sz="2400" b="1" dirty="0">
               <a:solidFill>
                 <a:schemeClr val="accent6">
                   <a:lumMod val="60000"/>
@@ -5225,23 +5848,7 @@
             <a:pPr marL="0" indent="0">
               <a:buNone/>
             </a:pPr>
-            <a:r>
-              <a:rPr lang="en-US" b="1" dirty="0">
-                <a:solidFill>
-                  <a:schemeClr val="accent6">
-                    <a:lumMod val="60000"/>
-                    <a:lumOff val="40000"/>
-                  </a:schemeClr>
-                </a:solidFill>
-              </a:rPr>
-              <a:t>Step 2: Covariance Matrix Computation: </a:t>
-            </a:r>
-          </a:p>
-          <a:p>
-            <a:pPr marL="0" indent="0">
-              <a:buNone/>
-            </a:pPr>
-            <a:endParaRPr lang="en-US" b="1" dirty="0">
+            <a:endParaRPr lang="en-US" sz="2400" b="1" dirty="0">
               <a:solidFill>
                 <a:schemeClr val="accent6">
                   <a:lumMod val="60000"/>
@@ -5255,52 +5862,55 @@
               <a:buNone/>
             </a:pPr>
             <a:r>
-              <a:rPr lang="en-US" dirty="0">
-                <a:solidFill>
-                  <a:schemeClr val="accent6">
-                    <a:lumMod val="60000"/>
-                    <a:lumOff val="40000"/>
-                  </a:schemeClr>
-                </a:solidFill>
-              </a:rPr>
-              <a:t>The covariance matrix tells us </a:t>
-            </a:r>
-            <a:r>
-              <a:rPr lang="en-US" b="1" dirty="0">
-                <a:solidFill>
-                  <a:schemeClr val="accent6">
-                    <a:lumMod val="60000"/>
-                    <a:lumOff val="40000"/>
-                  </a:schemeClr>
-                </a:solidFill>
-              </a:rPr>
-              <a:t>how features vary together. </a:t>
-            </a:r>
-            <a:r>
-              <a:rPr lang="en-US" dirty="0">
-                <a:solidFill>
-                  <a:schemeClr val="accent6">
-                    <a:lumMod val="60000"/>
-                    <a:lumOff val="40000"/>
-                  </a:schemeClr>
-                </a:solidFill>
-              </a:rPr>
-              <a:t>It capture relationships (variances + covariances) between features to identify directions of maximum variance.</a:t>
-            </a:r>
-            <a:endParaRPr lang="en-US" b="1" dirty="0">
-              <a:solidFill>
-                <a:schemeClr val="accent6">
-                  <a:lumMod val="60000"/>
-                  <a:lumOff val="40000"/>
-                </a:schemeClr>
-              </a:solidFill>
-            </a:endParaRPr>
+              <a:rPr lang="en-US" sz="2400" b="1" dirty="0">
+                <a:solidFill>
+                  <a:schemeClr val="accent6">
+                    <a:lumMod val="60000"/>
+                    <a:lumOff val="40000"/>
+                  </a:schemeClr>
+                </a:solidFill>
+              </a:rPr>
+              <a:t>Step 2: Covariance Matrix Computation: </a:t>
+            </a:r>
           </a:p>
           <a:p>
             <a:pPr marL="0" indent="0">
               <a:buNone/>
             </a:pPr>
-            <a:endParaRPr lang="en-US" dirty="0">
+            <a:r>
+              <a:rPr lang="en-US" sz="2400" dirty="0">
+                <a:solidFill>
+                  <a:schemeClr val="accent6">
+                    <a:lumMod val="60000"/>
+                    <a:lumOff val="40000"/>
+                  </a:schemeClr>
+                </a:solidFill>
+              </a:rPr>
+              <a:t>The covariance matrix tells us </a:t>
+            </a:r>
+            <a:r>
+              <a:rPr lang="en-US" sz="2400" b="1" dirty="0">
+                <a:solidFill>
+                  <a:schemeClr val="accent6">
+                    <a:lumMod val="60000"/>
+                    <a:lumOff val="40000"/>
+                  </a:schemeClr>
+                </a:solidFill>
+              </a:rPr>
+              <a:t>how features vary together. </a:t>
+            </a:r>
+            <a:r>
+              <a:rPr lang="en-US" sz="2400" dirty="0">
+                <a:solidFill>
+                  <a:schemeClr val="accent6">
+                    <a:lumMod val="60000"/>
+                    <a:lumOff val="40000"/>
+                  </a:schemeClr>
+                </a:solidFill>
+              </a:rPr>
+              <a:t>It capture relationships (variances + covariances) between features to identify directions of maximum variance.</a:t>
+            </a:r>
+            <a:endParaRPr lang="en-US" sz="2400" b="1" dirty="0">
               <a:solidFill>
                 <a:schemeClr val="accent6">
                   <a:lumMod val="60000"/>
@@ -5383,118 +5993,8 @@
           </a:p>
         </p:txBody>
       </p:sp>
-      <p:pic>
-        <p:nvPicPr>
-          <p:cNvPr id="5" name="Picture 4">
-            <a:extLst>
-              <a:ext uri="{FF2B5EF4-FFF2-40B4-BE49-F238E27FC236}">
-                <a16:creationId xmlns:a16="http://schemas.microsoft.com/office/drawing/2014/main" id="{57B08321-57D4-111B-C0AE-E2FDBECA34B8}"/>
-              </a:ext>
-            </a:extLst>
-          </p:cNvPr>
-          <p:cNvPicPr>
-            <a:picLocks noChangeAspect="1"/>
-          </p:cNvPicPr>
-          <p:nvPr/>
-        </p:nvPicPr>
-        <p:blipFill>
-          <a:blip r:embed="rId2">
-            <a:extLst>
-              <a:ext uri="{28A0092B-C50C-407E-A947-70E740481C1C}">
-                <a14:useLocalDpi xmlns:a14="http://schemas.microsoft.com/office/drawing/2010/main" val="0"/>
-              </a:ext>
-            </a:extLst>
-          </a:blip>
-          <a:stretch>
-            <a:fillRect/>
-          </a:stretch>
-        </p:blipFill>
-        <p:spPr>
-          <a:xfrm>
-            <a:off x="573853" y="5553009"/>
-            <a:ext cx="4048690" cy="933580"/>
-          </a:xfrm>
-          <a:prstGeom prst="rect">
-            <a:avLst/>
-          </a:prstGeom>
-        </p:spPr>
-      </p:pic>
-      <p:sp>
-        <p:nvSpPr>
-          <p:cNvPr id="6" name="Rectangle 5">
-            <a:extLst>
-              <a:ext uri="{FF2B5EF4-FFF2-40B4-BE49-F238E27FC236}">
-                <a16:creationId xmlns:a16="http://schemas.microsoft.com/office/drawing/2014/main" id="{0ABEFC3E-7F9F-E0D9-E28A-3B50020C95D4}"/>
-              </a:ext>
-            </a:extLst>
-          </p:cNvPr>
-          <p:cNvSpPr/>
-          <p:nvPr/>
-        </p:nvSpPr>
-        <p:spPr>
-          <a:xfrm>
-            <a:off x="5873460" y="5808504"/>
-            <a:ext cx="5793894" cy="369332"/>
-          </a:xfrm>
-          <a:prstGeom prst="rect">
-            <a:avLst/>
-          </a:prstGeom>
-        </p:spPr>
-        <p:txBody>
-          <a:bodyPr wrap="none">
-            <a:spAutoFit/>
-          </a:bodyPr>
-          <a:lstStyle/>
-          <a:p>
-            <a:r>
-              <a:rPr lang="en-US">
-                <a:solidFill>
-                  <a:schemeClr val="accent6">
-                    <a:lumMod val="60000"/>
-                    <a:lumOff val="40000"/>
-                  </a:schemeClr>
-                </a:solidFill>
-              </a:rPr>
-              <a:t>,where </a:t>
-            </a:r>
-            <a:r>
-              <a:rPr lang="en-US" dirty="0">
-                <a:solidFill>
-                  <a:schemeClr val="accent6">
-                    <a:lumMod val="60000"/>
-                    <a:lumOff val="40000"/>
-                  </a:schemeClr>
-                </a:solidFill>
-              </a:rPr>
-              <a:t>each </a:t>
-            </a:r>
-            <a:r>
-              <a:rPr lang="en-US" dirty="0" err="1">
-                <a:solidFill>
-                  <a:schemeClr val="accent6">
-                    <a:lumMod val="60000"/>
-                    <a:lumOff val="40000"/>
-                  </a:schemeClr>
-                </a:solidFill>
-              </a:rPr>
-              <a:t>PC_i</a:t>
-            </a:r>
-            <a:r>
-              <a:rPr lang="en-US" dirty="0">
-                <a:solidFill>
-                  <a:schemeClr val="accent6">
-                    <a:lumMod val="60000"/>
-                    <a:lumOff val="40000"/>
-                  </a:schemeClr>
-                </a:solidFill>
-              </a:rPr>
-              <a:t> is a principal component (an eigenvector).</a:t>
-            </a:r>
-          </a:p>
-        </p:txBody>
-      </p:sp>
-      <mc:AlternateContent xmlns:mc="http://schemas.openxmlformats.org/markup-compatibility/2006" xmlns:a14="http://schemas.microsoft.com/office/drawing/2010/main">
-        <mc:Choice Requires="a14">
+      <mc:AlternateContent xmlns:mc="http://schemas.openxmlformats.org/markup-compatibility/2006">
+        <mc:Choice xmlns:a14="http://schemas.microsoft.com/office/drawing/2010/main" Requires="a14">
           <p:sp>
             <p:nvSpPr>
               <p:cNvPr id="9" name="TextBox 8">
@@ -5510,7 +6010,7 @@
             <p:spPr>
               <a:xfrm>
                 <a:off x="352424" y="866995"/>
-                <a:ext cx="11534775" cy="5044714"/>
+                <a:ext cx="11534775" cy="3371564"/>
               </a:xfrm>
               <a:prstGeom prst="rect">
                 <a:avLst/>
@@ -5527,7 +6027,7 @@
                   <a:buNone/>
                 </a:pPr>
                 <a:r>
-                  <a:rPr lang="en-US" b="1" dirty="0">
+                  <a:rPr lang="en-US" sz="2400" b="1" dirty="0">
                     <a:solidFill>
                       <a:schemeClr val="accent6">
                         <a:lumMod val="60000"/>
@@ -5542,8 +6042,21 @@
                 <a:pPr marL="0" indent="0">
                   <a:buNone/>
                 </a:pPr>
+                <a:endParaRPr lang="en-US" sz="2400" dirty="0">
+                  <a:solidFill>
+                    <a:schemeClr val="accent6">
+                      <a:lumMod val="60000"/>
+                      <a:lumOff val="40000"/>
+                    </a:schemeClr>
+                  </a:solidFill>
+                </a:endParaRPr>
+              </a:p>
+              <a:p>
+                <a:pPr marL="0" indent="0">
+                  <a:buNone/>
+                </a:pPr>
                 <a:r>
-                  <a:rPr lang="en-US" dirty="0">
+                  <a:rPr lang="en-US" sz="2400" dirty="0">
                     <a:solidFill>
                       <a:schemeClr val="accent6">
                         <a:lumMod val="60000"/>
@@ -5554,7 +6067,7 @@
                   <a:t>You start with a </a:t>
                 </a:r>
                 <a:r>
-                  <a:rPr lang="en-US" b="1" dirty="0">
+                  <a:rPr lang="en-US" sz="2400" b="1" dirty="0">
                     <a:solidFill>
                       <a:schemeClr val="accent6">
                         <a:lumMod val="60000"/>
@@ -5565,7 +6078,7 @@
                   <a:t>covariance matrix</a:t>
                 </a:r>
                 <a:r>
-                  <a:rPr lang="en-US" dirty="0">
+                  <a:rPr lang="en-US" sz="2400" dirty="0">
                     <a:solidFill>
                       <a:schemeClr val="accent6">
                         <a:lumMod val="60000"/>
@@ -5590,7 +6103,7 @@
                         <m:rPr>
                           <m:sty m:val="p"/>
                         </m:rPr>
-                        <a:rPr lang="el-GR">
+                        <a:rPr lang="el-GR" sz="2400">
                           <a:solidFill>
                             <a:schemeClr val="accent6">
                               <a:lumMod val="60000"/>
@@ -5602,7 +6115,7 @@
                         <m:t>Σ</m:t>
                       </m:r>
                       <m:r>
-                        <a:rPr lang="el-GR">
+                        <a:rPr lang="el-GR" sz="2400">
                           <a:solidFill>
                             <a:schemeClr val="accent6">
                               <a:lumMod val="60000"/>
@@ -5616,7 +6129,7 @@
                       <m:f>
                         <m:fPr>
                           <m:ctrlPr>
-                            <a:rPr lang="ar-AE" i="1">
+                            <a:rPr lang="ar-AE" sz="2400" i="1">
                               <a:solidFill>
                                 <a:schemeClr val="accent6">
                                   <a:lumMod val="60000"/>
@@ -5629,7 +6142,7 @@
                         </m:fPr>
                         <m:num>
                           <m:r>
-                            <a:rPr lang="ar-AE">
+                            <a:rPr lang="ar-AE" sz="2400">
                               <a:solidFill>
                                 <a:schemeClr val="accent6">
                                   <a:lumMod val="60000"/>
@@ -5643,7 +6156,7 @@
                         </m:num>
                         <m:den>
                           <m:r>
-                            <a:rPr lang="ar-AE" i="1">
+                            <a:rPr lang="ar-AE" sz="2400" i="1">
                               <a:solidFill>
                                 <a:schemeClr val="accent6">
                                   <a:lumMod val="60000"/>
@@ -5659,7 +6172,7 @@
                       <m:sSup>
                         <m:sSupPr>
                           <m:ctrlPr>
-                            <a:rPr lang="ar-AE" i="1">
+                            <a:rPr lang="ar-AE" sz="2400" i="1">
                               <a:solidFill>
                                 <a:schemeClr val="accent6">
                                   <a:lumMod val="60000"/>
@@ -5672,7 +6185,7 @@
                         </m:sSupPr>
                         <m:e>
                           <m:r>
-                            <a:rPr lang="ar-AE" i="1">
+                            <a:rPr lang="ar-AE" sz="2400" i="1">
                               <a:solidFill>
                                 <a:schemeClr val="accent6">
                                   <a:lumMod val="60000"/>
@@ -5686,7 +6199,7 @@
                         </m:e>
                         <m:sup>
                           <m:r>
-                            <a:rPr lang="ar-AE" i="1">
+                            <a:rPr lang="ar-AE" sz="2400" i="1">
                               <a:solidFill>
                                 <a:schemeClr val="accent6">
                                   <a:lumMod val="60000"/>
@@ -5700,7 +6213,7 @@
                         </m:sup>
                       </m:sSup>
                       <m:r>
-                        <a:rPr lang="ar-AE" i="1">
+                        <a:rPr lang="ar-AE" sz="2400" i="1">
                           <a:solidFill>
                             <a:schemeClr val="accent6">
                               <a:lumMod val="60000"/>
@@ -5714,7 +6227,20 @@
                     </m:oMath>
                   </m:oMathPara>
                 </a14:m>
-                <a:endParaRPr lang="ar-AE" dirty="0">
+                <a:endParaRPr lang="ar-AE" sz="2400" dirty="0">
+                  <a:solidFill>
+                    <a:schemeClr val="accent6">
+                      <a:lumMod val="60000"/>
+                      <a:lumOff val="40000"/>
+                    </a:schemeClr>
+                  </a:solidFill>
+                </a:endParaRPr>
+              </a:p>
+              <a:p>
+                <a:pPr marL="0" indent="0">
+                  <a:buNone/>
+                </a:pPr>
+                <a:endParaRPr lang="en-US" sz="2400" dirty="0">
                   <a:solidFill>
                     <a:schemeClr val="accent6">
                       <a:lumMod val="60000"/>
@@ -5728,7 +6254,7 @@
                   <a:buNone/>
                 </a:pPr>
                 <a:r>
-                  <a:rPr lang="en-US" dirty="0">
+                  <a:rPr lang="en-US" sz="2400" dirty="0">
                     <a:solidFill>
                       <a:schemeClr val="accent6">
                         <a:lumMod val="60000"/>
@@ -5739,7 +6265,7 @@
                   <a:t>Then you compute its </a:t>
                 </a:r>
                 <a:r>
-                  <a:rPr lang="en-US" b="1" dirty="0">
+                  <a:rPr lang="en-US" sz="2400" b="1" dirty="0">
                     <a:solidFill>
                       <a:schemeClr val="accent6">
                         <a:lumMod val="60000"/>
@@ -5750,7 +6276,7 @@
                   <a:t>eigenvectors</a:t>
                 </a:r>
                 <a:r>
-                  <a:rPr lang="en-US" dirty="0">
+                  <a:rPr lang="en-US" sz="2400" dirty="0">
                     <a:solidFill>
                       <a:schemeClr val="accent6">
                         <a:lumMod val="60000"/>
@@ -5761,7 +6287,7 @@
                   <a:t> and </a:t>
                 </a:r>
                 <a:r>
-                  <a:rPr lang="en-US" b="1" dirty="0">
+                  <a:rPr lang="en-US" sz="2400" b="1" dirty="0">
                     <a:solidFill>
                       <a:schemeClr val="accent6">
                         <a:lumMod val="60000"/>
@@ -5772,7 +6298,7 @@
                   <a:t>eigenvalues</a:t>
                 </a:r>
                 <a:r>
-                  <a:rPr lang="en-US" dirty="0">
+                  <a:rPr lang="en-US" sz="2400" dirty="0">
                     <a:solidFill>
                       <a:schemeClr val="accent6">
                         <a:lumMod val="60000"/>
@@ -5797,7 +6323,7 @@
                         <m:rPr>
                           <m:sty m:val="p"/>
                         </m:rPr>
-                        <a:rPr lang="el-GR">
+                        <a:rPr lang="el-GR" sz="2400">
                           <a:solidFill>
                             <a:schemeClr val="accent6">
                               <a:lumMod val="60000"/>
@@ -5811,7 +6337,7 @@
                       <m:sSub>
                         <m:sSubPr>
                           <m:ctrlPr>
-                            <a:rPr lang="ar-AE" i="1">
+                            <a:rPr lang="ar-AE" sz="2400" i="1">
                               <a:solidFill>
                                 <a:schemeClr val="accent6">
                                   <a:lumMod val="60000"/>
@@ -5824,7 +6350,7 @@
                         </m:sSubPr>
                         <m:e>
                           <m:r>
-                            <a:rPr lang="ar-AE" i="1">
+                            <a:rPr lang="ar-AE" sz="2400" i="1">
                               <a:solidFill>
                                 <a:schemeClr val="accent6">
                                   <a:lumMod val="60000"/>
@@ -5838,7 +6364,7 @@
                         </m:e>
                         <m:sub>
                           <m:r>
-                            <a:rPr lang="ar-AE" i="1">
+                            <a:rPr lang="ar-AE" sz="2400" i="1">
                               <a:solidFill>
                                 <a:schemeClr val="accent6">
                                   <a:lumMod val="60000"/>
@@ -5852,7 +6378,7 @@
                         </m:sub>
                       </m:sSub>
                       <m:r>
-                        <a:rPr lang="ar-AE">
+                        <a:rPr lang="ar-AE" sz="2400">
                           <a:solidFill>
                             <a:schemeClr val="accent6">
                               <a:lumMod val="60000"/>
@@ -5866,7 +6392,7 @@
                       <m:sSub>
                         <m:sSubPr>
                           <m:ctrlPr>
-                            <a:rPr lang="ar-AE" i="1">
+                            <a:rPr lang="ar-AE" sz="2400" i="1">
                               <a:solidFill>
                                 <a:schemeClr val="accent6">
                                   <a:lumMod val="60000"/>
@@ -5879,7 +6405,7 @@
                         </m:sSubPr>
                         <m:e>
                           <m:r>
-                            <a:rPr lang="ar-AE" i="1">
+                            <a:rPr lang="ar-AE" sz="2400" i="1">
                               <a:solidFill>
                                 <a:schemeClr val="accent6">
                                   <a:lumMod val="60000"/>
@@ -5893,7 +6419,7 @@
                         </m:e>
                         <m:sub>
                           <m:r>
-                            <a:rPr lang="ar-AE" i="1">
+                            <a:rPr lang="ar-AE" sz="2400" i="1">
                               <a:solidFill>
                                 <a:schemeClr val="accent6">
                                   <a:lumMod val="60000"/>
@@ -5909,7 +6435,7 @@
                       <m:sSub>
                         <m:sSubPr>
                           <m:ctrlPr>
-                            <a:rPr lang="ar-AE" i="1">
+                            <a:rPr lang="ar-AE" sz="2400" i="1">
                               <a:solidFill>
                                 <a:schemeClr val="accent6">
                                   <a:lumMod val="60000"/>
@@ -5922,7 +6448,7 @@
                         </m:sSubPr>
                         <m:e>
                           <m:r>
-                            <a:rPr lang="ar-AE" i="1">
+                            <a:rPr lang="ar-AE" sz="2400" i="1">
                               <a:solidFill>
                                 <a:schemeClr val="accent6">
                                   <a:lumMod val="60000"/>
@@ -5936,7 +6462,7 @@
                         </m:e>
                         <m:sub>
                           <m:r>
-                            <a:rPr lang="ar-AE" i="1">
+                            <a:rPr lang="ar-AE" sz="2400" i="1">
                               <a:solidFill>
                                 <a:schemeClr val="accent6">
                                   <a:lumMod val="60000"/>
@@ -5952,7 +6478,7 @@
                     </m:oMath>
                   </m:oMathPara>
                 </a14:m>
-                <a:endParaRPr lang="ar-AE" dirty="0">
+                <a:endParaRPr lang="ar-AE" sz="2400" dirty="0">
                   <a:solidFill>
                     <a:schemeClr val="accent6">
                       <a:lumMod val="60000"/>
@@ -5961,188 +6487,10 @@
                   </a:solidFill>
                 </a:endParaRPr>
               </a:p>
-              <a:p>
-                <a:pPr marL="0" indent="0">
-                  <a:buNone/>
-                </a:pPr>
-                <a:endParaRPr lang="en-US" b="1" dirty="0">
-                  <a:solidFill>
-                    <a:schemeClr val="accent6">
-                      <a:lumMod val="60000"/>
-                      <a:lumOff val="40000"/>
-                    </a:schemeClr>
-                  </a:solidFill>
-                </a:endParaRPr>
-              </a:p>
-              <a:p>
-                <a:pPr marL="0" indent="0">
-                  <a:buNone/>
-                </a:pPr>
-                <a:endParaRPr lang="en-US" b="1" dirty="0">
-                  <a:solidFill>
-                    <a:schemeClr val="accent6">
-                      <a:lumMod val="60000"/>
-                      <a:lumOff val="40000"/>
-                    </a:schemeClr>
-                  </a:solidFill>
-                </a:endParaRPr>
-              </a:p>
-              <a:p>
-                <a:pPr marL="0" indent="0">
-                  <a:buNone/>
-                </a:pPr>
-                <a:r>
-                  <a:rPr lang="en-US" b="1" dirty="0">
-                    <a:solidFill>
-                      <a:schemeClr val="accent6">
-                        <a:lumMod val="60000"/>
-                        <a:lumOff val="40000"/>
-                      </a:schemeClr>
-                    </a:solidFill>
-                  </a:rPr>
-                  <a:t>Step 4: Create a Feature Vector: </a:t>
-                </a:r>
-                <a:r>
-                  <a:rPr lang="en-US" dirty="0">
-                    <a:solidFill>
-                      <a:schemeClr val="accent6">
-                        <a:lumMod val="60000"/>
-                        <a:lumOff val="40000"/>
-                      </a:schemeClr>
-                    </a:solidFill>
-                  </a:rPr>
-                  <a:t>Think of the feature vector as creating a new set of "coordinate axes" that are better aligned with the spread (variance) of your data</a:t>
-                </a:r>
-              </a:p>
-              <a:p>
-                <a:r>
-                  <a:rPr lang="en-US" dirty="0">
-                    <a:solidFill>
-                      <a:schemeClr val="accent6">
-                        <a:lumMod val="60000"/>
-                        <a:lumOff val="40000"/>
-                      </a:schemeClr>
-                    </a:solidFill>
-                  </a:rPr>
-                  <a:t>Here we select the top k eigenvectors that correspond to the largest eigenvalues.</a:t>
-                </a:r>
-              </a:p>
-              <a:p>
-                <a:pPr marL="285750" indent="-285750">
-                  <a:buFont typeface="Arial" panose="020B0604020202020204" pitchFamily="34" charset="0"/>
-                  <a:buChar char="•"/>
-                </a:pPr>
-                <a:r>
-                  <a:rPr lang="en-US" dirty="0">
-                    <a:solidFill>
-                      <a:schemeClr val="accent6">
-                        <a:lumMod val="60000"/>
-                        <a:lumOff val="40000"/>
-                      </a:schemeClr>
-                    </a:solidFill>
-                  </a:rPr>
-                  <a:t>The eigenvalues tell us how much variance (information) each principal component captures. Eigenvalues show </a:t>
-                </a:r>
-                <a:r>
-                  <a:rPr lang="en-US" i="1" dirty="0">
-                    <a:solidFill>
-                      <a:schemeClr val="accent6">
-                        <a:lumMod val="60000"/>
-                        <a:lumOff val="40000"/>
-                      </a:schemeClr>
-                    </a:solidFill>
-                  </a:rPr>
-                  <a:t>“how much”</a:t>
-                </a:r>
-                <a:r>
-                  <a:rPr lang="en-US" dirty="0">
-                    <a:solidFill>
-                      <a:schemeClr val="accent6">
-                        <a:lumMod val="60000"/>
-                        <a:lumOff val="40000"/>
-                      </a:schemeClr>
-                    </a:solidFill>
-                  </a:rPr>
-                  <a:t> it varies there.</a:t>
-                </a:r>
-              </a:p>
-              <a:p>
-                <a:pPr marL="285750" indent="-285750">
-                  <a:buFont typeface="Arial" panose="020B0604020202020204" pitchFamily="34" charset="0"/>
-                  <a:buChar char="•"/>
-                </a:pPr>
-                <a:r>
-                  <a:rPr lang="en-US" dirty="0">
-                    <a:solidFill>
-                      <a:schemeClr val="accent6">
-                        <a:lumMod val="60000"/>
-                        <a:lumOff val="40000"/>
-                      </a:schemeClr>
-                    </a:solidFill>
-                  </a:rPr>
-                  <a:t>We want to keep the components (eigenvectors) that capture the most variance → they are the most "informative.“ Eigenvectors show </a:t>
-                </a:r>
-                <a:r>
-                  <a:rPr lang="en-US" i="1" dirty="0">
-                    <a:solidFill>
-                      <a:schemeClr val="accent6">
-                        <a:lumMod val="60000"/>
-                        <a:lumOff val="40000"/>
-                      </a:schemeClr>
-                    </a:solidFill>
-                  </a:rPr>
-                  <a:t>“where”</a:t>
-                </a:r>
-                <a:r>
-                  <a:rPr lang="en-US" dirty="0">
-                    <a:solidFill>
-                      <a:schemeClr val="accent6">
-                        <a:lumMod val="60000"/>
-                        <a:lumOff val="40000"/>
-                      </a:schemeClr>
-                    </a:solidFill>
-                  </a:rPr>
-                  <a:t> the data varies the most.</a:t>
-                </a:r>
-                <a:br>
-                  <a:rPr lang="en-US" dirty="0">
-                    <a:solidFill>
-                      <a:schemeClr val="accent6">
-                        <a:lumMod val="60000"/>
-                        <a:lumOff val="40000"/>
-                      </a:schemeClr>
-                    </a:solidFill>
-                  </a:rPr>
-                </a:br>
-                <a:endParaRPr lang="en-US" dirty="0">
-                  <a:solidFill>
-                    <a:schemeClr val="accent6">
-                      <a:lumMod val="60000"/>
-                      <a:lumOff val="40000"/>
-                    </a:schemeClr>
-                  </a:solidFill>
-                </a:endParaRPr>
-              </a:p>
-              <a:p>
-                <a:pPr marL="0" indent="0">
-                  <a:buNone/>
-                </a:pPr>
-                <a:r>
-                  <a:rPr lang="en-US" dirty="0">
-                    <a:solidFill>
-                      <a:schemeClr val="accent6">
-                        <a:lumMod val="60000"/>
-                        <a:lumOff val="40000"/>
-                      </a:schemeClr>
-                    </a:solidFill>
-                  </a:rPr>
-                  <a:t>Form a feature vector (or projection matrix) which is just a matrix of these top k eigenvectors, where each eigenvector is a column:</a:t>
-                </a:r>
-              </a:p>
             </p:txBody>
           </p:sp>
         </mc:Choice>
-        <mc:Fallback xmlns="">
+        <mc:Fallback>
           <p:sp>
             <p:nvSpPr>
               <p:cNvPr id="9" name="TextBox 8">
@@ -6160,15 +6508,15 @@
             <p:spPr>
               <a:xfrm>
                 <a:off x="352424" y="866995"/>
-                <a:ext cx="11534775" cy="5044714"/>
+                <a:ext cx="11534775" cy="3371564"/>
               </a:xfrm>
               <a:prstGeom prst="rect">
                 <a:avLst/>
               </a:prstGeom>
               <a:blipFill>
-                <a:blip r:embed="rId3"/>
+                <a:blip r:embed="rId2"/>
                 <a:stretch>
-                  <a:fillRect l="-476" t="-604" r="-476" b="-966"/>
+                  <a:fillRect l="-846" t="-1447"/>
                 </a:stretch>
               </a:blipFill>
             </p:spPr>
@@ -6205,6 +6553,358 @@
   <p:cSld>
     <p:spTree>
       <p:nvGrpSpPr>
+        <p:cNvPr id="1" name="">
+          <a:extLst>
+            <a:ext uri="{FF2B5EF4-FFF2-40B4-BE49-F238E27FC236}">
+              <a16:creationId xmlns:a16="http://schemas.microsoft.com/office/drawing/2014/main" id="{9F891277-6478-B813-EAD7-D4335CB18BEC}"/>
+            </a:ext>
+          </a:extLst>
+        </p:cNvPr>
+        <p:cNvGrpSpPr/>
+        <p:nvPr/>
+      </p:nvGrpSpPr>
+      <p:grpSpPr>
+        <a:xfrm>
+          <a:off x="0" y="0"/>
+          <a:ext cx="0" cy="0"/>
+          <a:chOff x="0" y="0"/>
+          <a:chExt cx="0" cy="0"/>
+        </a:xfrm>
+      </p:grpSpPr>
+      <p:sp>
+        <p:nvSpPr>
+          <p:cNvPr id="4" name="Title 1">
+            <a:extLst>
+              <a:ext uri="{FF2B5EF4-FFF2-40B4-BE49-F238E27FC236}">
+                <a16:creationId xmlns:a16="http://schemas.microsoft.com/office/drawing/2014/main" id="{D150D668-3A81-B52E-9377-D9FFC461D65D}"/>
+              </a:ext>
+            </a:extLst>
+          </p:cNvPr>
+          <p:cNvSpPr>
+            <a:spLocks noGrp="1"/>
+          </p:cNvSpPr>
+          <p:nvPr>
+            <p:ph type="title"/>
+          </p:nvPr>
+        </p:nvSpPr>
+        <p:spPr>
+          <a:xfrm>
+            <a:off x="838200" y="160938"/>
+            <a:ext cx="10515600" cy="558153"/>
+          </a:xfrm>
+        </p:spPr>
+        <p:txBody>
+          <a:bodyPr>
+            <a:noAutofit/>
+          </a:bodyPr>
+          <a:lstStyle/>
+          <a:p>
+            <a:r>
+              <a:rPr lang="en-US" sz="2800" dirty="0"/>
+              <a:t>Eigen value and E. vector (Application in PCA) (p2)</a:t>
+            </a:r>
+            <a:endParaRPr lang="en-IN" sz="2800" dirty="0"/>
+          </a:p>
+        </p:txBody>
+      </p:sp>
+      <p:pic>
+        <p:nvPicPr>
+          <p:cNvPr id="5" name="Picture 4">
+            <a:extLst>
+              <a:ext uri="{FF2B5EF4-FFF2-40B4-BE49-F238E27FC236}">
+                <a16:creationId xmlns:a16="http://schemas.microsoft.com/office/drawing/2014/main" id="{36508331-2F93-FF42-9B45-456D2D7D2678}"/>
+              </a:ext>
+            </a:extLst>
+          </p:cNvPr>
+          <p:cNvPicPr>
+            <a:picLocks noChangeAspect="1"/>
+          </p:cNvPicPr>
+          <p:nvPr/>
+        </p:nvPicPr>
+        <p:blipFill>
+          <a:blip r:embed="rId2">
+            <a:extLst>
+              <a:ext uri="{28A0092B-C50C-407E-A947-70E740481C1C}">
+                <a14:useLocalDpi xmlns:a14="http://schemas.microsoft.com/office/drawing/2010/main" val="0"/>
+              </a:ext>
+            </a:extLst>
+          </a:blip>
+          <a:stretch>
+            <a:fillRect/>
+          </a:stretch>
+        </p:blipFill>
+        <p:spPr>
+          <a:xfrm>
+            <a:off x="765877" y="5341714"/>
+            <a:ext cx="4048690" cy="933580"/>
+          </a:xfrm>
+          <a:prstGeom prst="rect">
+            <a:avLst/>
+          </a:prstGeom>
+        </p:spPr>
+      </p:pic>
+      <p:sp>
+        <p:nvSpPr>
+          <p:cNvPr id="6" name="Rectangle 5">
+            <a:extLst>
+              <a:ext uri="{FF2B5EF4-FFF2-40B4-BE49-F238E27FC236}">
+                <a16:creationId xmlns:a16="http://schemas.microsoft.com/office/drawing/2014/main" id="{A1D47E70-17DD-636E-8221-C28AC5A13DE5}"/>
+              </a:ext>
+            </a:extLst>
+          </p:cNvPr>
+          <p:cNvSpPr/>
+          <p:nvPr/>
+        </p:nvSpPr>
+        <p:spPr>
+          <a:xfrm>
+            <a:off x="5873460" y="5808504"/>
+            <a:ext cx="5793894" cy="369332"/>
+          </a:xfrm>
+          <a:prstGeom prst="rect">
+            <a:avLst/>
+          </a:prstGeom>
+        </p:spPr>
+        <p:txBody>
+          <a:bodyPr wrap="none">
+            <a:spAutoFit/>
+          </a:bodyPr>
+          <a:lstStyle/>
+          <a:p>
+            <a:r>
+              <a:rPr lang="en-US" dirty="0">
+                <a:solidFill>
+                  <a:schemeClr val="accent6">
+                    <a:lumMod val="60000"/>
+                    <a:lumOff val="40000"/>
+                  </a:schemeClr>
+                </a:solidFill>
+              </a:rPr>
+              <a:t>,where each </a:t>
+            </a:r>
+            <a:r>
+              <a:rPr lang="en-US" dirty="0" err="1">
+                <a:solidFill>
+                  <a:schemeClr val="accent6">
+                    <a:lumMod val="60000"/>
+                    <a:lumOff val="40000"/>
+                  </a:schemeClr>
+                </a:solidFill>
+              </a:rPr>
+              <a:t>PC_i</a:t>
+            </a:r>
+            <a:r>
+              <a:rPr lang="en-US" dirty="0">
+                <a:solidFill>
+                  <a:schemeClr val="accent6">
+                    <a:lumMod val="60000"/>
+                    <a:lumOff val="40000"/>
+                  </a:schemeClr>
+                </a:solidFill>
+              </a:rPr>
+              <a:t> is a principal component (an eigenvector).</a:t>
+            </a:r>
+          </a:p>
+        </p:txBody>
+      </p:sp>
+      <p:sp>
+        <p:nvSpPr>
+          <p:cNvPr id="9" name="TextBox 8">
+            <a:extLst>
+              <a:ext uri="{FF2B5EF4-FFF2-40B4-BE49-F238E27FC236}">
+                <a16:creationId xmlns:a16="http://schemas.microsoft.com/office/drawing/2014/main" id="{06322E0E-D22E-DC46-E9D5-AB6466425AB7}"/>
+              </a:ext>
+            </a:extLst>
+          </p:cNvPr>
+          <p:cNvSpPr txBox="1"/>
+          <p:nvPr/>
+        </p:nvSpPr>
+        <p:spPr>
+          <a:xfrm>
+            <a:off x="352424" y="866995"/>
+            <a:ext cx="11534775" cy="3785652"/>
+          </a:xfrm>
+          <a:prstGeom prst="rect">
+            <a:avLst/>
+          </a:prstGeom>
+          <a:noFill/>
+        </p:spPr>
+        <p:txBody>
+          <a:bodyPr wrap="square">
+            <a:spAutoFit/>
+          </a:bodyPr>
+          <a:lstStyle/>
+          <a:p>
+            <a:pPr marL="0" indent="0">
+              <a:buNone/>
+            </a:pPr>
+            <a:r>
+              <a:rPr lang="en-US" sz="2400" b="1" dirty="0">
+                <a:solidFill>
+                  <a:schemeClr val="accent6">
+                    <a:lumMod val="60000"/>
+                    <a:lumOff val="40000"/>
+                  </a:schemeClr>
+                </a:solidFill>
+              </a:rPr>
+              <a:t>Step 4: Create a Feature Vector: </a:t>
+            </a:r>
+            <a:r>
+              <a:rPr lang="en-US" sz="2400" dirty="0">
+                <a:solidFill>
+                  <a:schemeClr val="accent6">
+                    <a:lumMod val="60000"/>
+                    <a:lumOff val="40000"/>
+                  </a:schemeClr>
+                </a:solidFill>
+              </a:rPr>
+              <a:t>Think of the feature vector as creating a new set of "coordinate axes" that are better aligned with the spread (variance) of your data</a:t>
+            </a:r>
+          </a:p>
+          <a:p>
+            <a:r>
+              <a:rPr lang="en-US" sz="2400" dirty="0">
+                <a:solidFill>
+                  <a:schemeClr val="accent6">
+                    <a:lumMod val="60000"/>
+                    <a:lumOff val="40000"/>
+                  </a:schemeClr>
+                </a:solidFill>
+              </a:rPr>
+              <a:t>Here we select the top k eigenvectors that correspond to the largest eigenvalues.</a:t>
+            </a:r>
+          </a:p>
+          <a:p>
+            <a:pPr marL="285750" indent="-285750">
+              <a:buFont typeface="Arial" panose="020B0604020202020204" pitchFamily="34" charset="0"/>
+              <a:buChar char="•"/>
+            </a:pPr>
+            <a:r>
+              <a:rPr lang="en-US" sz="2400" dirty="0">
+                <a:solidFill>
+                  <a:schemeClr val="accent6">
+                    <a:lumMod val="60000"/>
+                    <a:lumOff val="40000"/>
+                  </a:schemeClr>
+                </a:solidFill>
+              </a:rPr>
+              <a:t>The eigenvalues tell us how much variance (information) each principal component captures. Eigenvalues show </a:t>
+            </a:r>
+            <a:r>
+              <a:rPr lang="en-US" sz="2400" i="1" dirty="0">
+                <a:solidFill>
+                  <a:schemeClr val="accent6">
+                    <a:lumMod val="60000"/>
+                    <a:lumOff val="40000"/>
+                  </a:schemeClr>
+                </a:solidFill>
+              </a:rPr>
+              <a:t>“how much”</a:t>
+            </a:r>
+            <a:r>
+              <a:rPr lang="en-US" sz="2400" dirty="0">
+                <a:solidFill>
+                  <a:schemeClr val="accent6">
+                    <a:lumMod val="60000"/>
+                    <a:lumOff val="40000"/>
+                  </a:schemeClr>
+                </a:solidFill>
+              </a:rPr>
+              <a:t> it varies there.</a:t>
+            </a:r>
+          </a:p>
+          <a:p>
+            <a:pPr marL="285750" indent="-285750">
+              <a:buFont typeface="Arial" panose="020B0604020202020204" pitchFamily="34" charset="0"/>
+              <a:buChar char="•"/>
+            </a:pPr>
+            <a:r>
+              <a:rPr lang="en-US" sz="2400" dirty="0">
+                <a:solidFill>
+                  <a:schemeClr val="accent6">
+                    <a:lumMod val="60000"/>
+                    <a:lumOff val="40000"/>
+                  </a:schemeClr>
+                </a:solidFill>
+              </a:rPr>
+              <a:t>We want to keep the components (eigenvectors) that capture the most variance → they are the most "informative.“ Eigenvectors show </a:t>
+            </a:r>
+            <a:r>
+              <a:rPr lang="en-US" sz="2400" i="1" dirty="0">
+                <a:solidFill>
+                  <a:schemeClr val="accent6">
+                    <a:lumMod val="60000"/>
+                    <a:lumOff val="40000"/>
+                  </a:schemeClr>
+                </a:solidFill>
+              </a:rPr>
+              <a:t>“where”</a:t>
+            </a:r>
+            <a:r>
+              <a:rPr lang="en-US" sz="2400" dirty="0">
+                <a:solidFill>
+                  <a:schemeClr val="accent6">
+                    <a:lumMod val="60000"/>
+                    <a:lumOff val="40000"/>
+                  </a:schemeClr>
+                </a:solidFill>
+              </a:rPr>
+              <a:t> the data varies the most.</a:t>
+            </a:r>
+            <a:br>
+              <a:rPr lang="en-US" sz="2400" dirty="0">
+                <a:solidFill>
+                  <a:schemeClr val="accent6">
+                    <a:lumMod val="60000"/>
+                    <a:lumOff val="40000"/>
+                  </a:schemeClr>
+                </a:solidFill>
+              </a:rPr>
+            </a:br>
+            <a:endParaRPr lang="en-US" sz="2400" dirty="0">
+              <a:solidFill>
+                <a:schemeClr val="accent6">
+                  <a:lumMod val="60000"/>
+                  <a:lumOff val="40000"/>
+                </a:schemeClr>
+              </a:solidFill>
+            </a:endParaRPr>
+          </a:p>
+          <a:p>
+            <a:pPr marL="0" indent="0">
+              <a:buNone/>
+            </a:pPr>
+            <a:r>
+              <a:rPr lang="en-US" sz="2400" dirty="0">
+                <a:solidFill>
+                  <a:schemeClr val="accent6">
+                    <a:lumMod val="60000"/>
+                    <a:lumOff val="40000"/>
+                  </a:schemeClr>
+                </a:solidFill>
+              </a:rPr>
+              <a:t>Form a feature vector (or projection matrix) which is just a matrix of these top k eigenvectors, where each eigenvector is a column:</a:t>
+            </a:r>
+          </a:p>
+        </p:txBody>
+      </p:sp>
+    </p:spTree>
+    <p:extLst>
+      <p:ext uri="{BB962C8B-B14F-4D97-AF65-F5344CB8AC3E}">
+        <p14:creationId xmlns:p14="http://schemas.microsoft.com/office/powerpoint/2010/main" val="949183875"/>
+      </p:ext>
+    </p:extLst>
+  </p:cSld>
+  <p:clrMapOvr>
+    <a:masterClrMapping/>
+  </p:clrMapOvr>
+</p:sld>
+</file>
+
+<file path=ppt/slides/slide6.xml><?xml version="1.0" encoding="utf-8"?>
+<p:sld xmlns:a="http://schemas.openxmlformats.org/drawingml/2006/main" xmlns:r="http://schemas.openxmlformats.org/officeDocument/2006/relationships" xmlns:p="http://schemas.openxmlformats.org/presentationml/2006/main">
+  <p:cSld>
+    <p:spTree>
+      <p:nvGrpSpPr>
         <p:cNvPr id="1" name=""/>
         <p:cNvGrpSpPr/>
         <p:nvPr/>
@@ -6243,7 +6943,7 @@
               <a:buNone/>
             </a:pPr>
             <a:r>
-              <a:rPr lang="en-US" b="1" dirty="0"/>
+              <a:rPr lang="en-US" sz="2400" b="1" dirty="0"/>
               <a:t>Step 5: Recast the Data Along the Principal Components Axes</a:t>
             </a:r>
           </a:p>
@@ -6307,8 +7007,8 @@
         </p:blipFill>
         <p:spPr>
           <a:xfrm>
-            <a:off x="470517" y="1802235"/>
-            <a:ext cx="4667901" cy="323895"/>
+            <a:off x="1426749" y="1846555"/>
+            <a:ext cx="5339302" cy="370482"/>
           </a:xfrm>
           <a:prstGeom prst="rect">
             <a:avLst/>
@@ -6328,7 +7028,7 @@
 </p:sld>
 </file>
 
-<file path=ppt/slides/slide6.xml><?xml version="1.0" encoding="utf-8"?>
+<file path=ppt/slides/slide7.xml><?xml version="1.0" encoding="utf-8"?>
 <p:sld xmlns:a="http://schemas.openxmlformats.org/drawingml/2006/main" xmlns:r="http://schemas.openxmlformats.org/officeDocument/2006/relationships" xmlns:p="http://schemas.openxmlformats.org/presentationml/2006/main">
   <p:cSld>
     <p:spTree>
@@ -6401,8 +7101,8 @@
         </p:nvSpPr>
         <p:spPr>
           <a:xfrm>
-            <a:off x="285750" y="671275"/>
-            <a:ext cx="11677649" cy="6186309"/>
+            <a:off x="285750" y="1521667"/>
+            <a:ext cx="11677649" cy="2677656"/>
           </a:xfrm>
           <a:prstGeom prst="rect">
             <a:avLst/>
@@ -6419,7 +7119,7 @@
               <a:buNone/>
             </a:pPr>
             <a:r>
-              <a:rPr lang="en-US" dirty="0">
+              <a:rPr lang="en-US" sz="2400" dirty="0">
                 <a:solidFill>
                   <a:schemeClr val="accent6">
                     <a:lumMod val="60000"/>
@@ -6434,7 +7134,7 @@
             <a:pPr marL="0" indent="0">
               <a:buNone/>
             </a:pPr>
-            <a:endParaRPr lang="en-US" dirty="0">
+            <a:endParaRPr lang="en-US" sz="2400" dirty="0">
               <a:solidFill>
                 <a:schemeClr val="accent6">
                   <a:lumMod val="60000"/>
@@ -6445,7 +7145,7 @@
           </a:p>
           <a:p>
             <a:r>
-              <a:rPr lang="en-US" b="1" dirty="0">
+              <a:rPr lang="en-US" sz="2400" b="1" dirty="0">
                 <a:solidFill>
                   <a:schemeClr val="accent6">
                     <a:lumMod val="60000"/>
@@ -6457,48 +7157,7 @@
             </a:r>
           </a:p>
           <a:p>
-            <a:pPr marL="0" indent="0">
-              <a:buNone/>
-            </a:pPr>
-            <a:r>
-              <a:rPr lang="en-US" dirty="0">
-                <a:solidFill>
-                  <a:schemeClr val="accent6">
-                    <a:lumMod val="60000"/>
-                    <a:lumOff val="40000"/>
-                  </a:schemeClr>
-                </a:solidFill>
-              </a:rPr>
-              <a:t>When studying relationships among variables (like in feature selection or clustering), eigenvectors of the covariance matrix show the </a:t>
-            </a:r>
-            <a:r>
-              <a:rPr lang="en-US" b="1" dirty="0">
-                <a:solidFill>
-                  <a:schemeClr val="accent6">
-                    <a:lumMod val="60000"/>
-                    <a:lumOff val="40000"/>
-                  </a:schemeClr>
-                </a:solidFill>
-              </a:rPr>
-              <a:t>uncorrelated directions</a:t>
-            </a:r>
-            <a:r>
-              <a:rPr lang="en-US" dirty="0">
-                <a:solidFill>
-                  <a:schemeClr val="accent6">
-                    <a:lumMod val="60000"/>
-                    <a:lumOff val="40000"/>
-                  </a:schemeClr>
-                </a:solidFill>
-              </a:rPr>
-              <a:t> (orthogonal features).</a:t>
-            </a:r>
-          </a:p>
-          <a:p>
-            <a:pPr marL="0" indent="0">
-              <a:buNone/>
-            </a:pPr>
-            <a:endParaRPr lang="en-US" dirty="0">
+            <a:endParaRPr lang="en-US" sz="2400" b="1" dirty="0">
               <a:solidFill>
                 <a:schemeClr val="accent6">
                   <a:lumMod val="60000"/>
@@ -6511,408 +7170,38 @@
             <a:pPr marL="0" indent="0">
               <a:buNone/>
             </a:pPr>
-            <a:endParaRPr lang="en-US" dirty="0">
-              <a:solidFill>
-                <a:schemeClr val="accent6">
-                  <a:lumMod val="60000"/>
-                  <a:lumOff val="40000"/>
-                </a:schemeClr>
-              </a:solidFill>
-            </a:endParaRPr>
-          </a:p>
-          <a:p>
-            <a:r>
-              <a:rPr lang="en-US" b="1" dirty="0">
-                <a:solidFill>
-                  <a:schemeClr val="accent6">
-                    <a:lumMod val="60000"/>
-                    <a:lumOff val="40000"/>
-                  </a:schemeClr>
-                </a:solidFill>
-              </a:rPr>
-              <a:t>Image Processing</a:t>
-            </a:r>
-            <a:r>
-              <a:rPr lang="en-US" dirty="0">
-                <a:solidFill>
-                  <a:schemeClr val="accent6">
-                    <a:lumMod val="60000"/>
-                    <a:lumOff val="40000"/>
-                  </a:schemeClr>
-                </a:solidFill>
-              </a:rPr>
-              <a:t>:</a:t>
-            </a:r>
-          </a:p>
-          <a:p>
-            <a:r>
-              <a:rPr lang="en-US" dirty="0">
-                <a:solidFill>
-                  <a:schemeClr val="accent6">
-                    <a:lumMod val="60000"/>
-                    <a:lumOff val="40000"/>
-                  </a:schemeClr>
-                </a:solidFill>
-              </a:rPr>
-              <a:t>They are used in facial recognition and </a:t>
-            </a:r>
-            <a:r>
-              <a:rPr lang="en-US" b="1" dirty="0">
-                <a:solidFill>
-                  <a:schemeClr val="accent6">
-                    <a:lumMod val="60000"/>
-                    <a:lumOff val="40000"/>
-                  </a:schemeClr>
-                </a:solidFill>
-                <a:hlinkClick r:id="rId2">
-                  <a:extLst>
-                    <a:ext uri="{A12FA001-AC4F-418D-AE19-62706E023703}">
-                      <ahyp:hlinkClr xmlns:ahyp="http://schemas.microsoft.com/office/drawing/2018/hyperlinkcolor" val="tx"/>
-                    </a:ext>
-                  </a:extLst>
-                </a:hlinkClick>
-              </a:rPr>
-              <a:t>image classification</a:t>
-            </a:r>
-            <a:r>
-              <a:rPr lang="en-US" dirty="0">
-                <a:solidFill>
-                  <a:schemeClr val="accent6">
-                    <a:lumMod val="60000"/>
-                    <a:lumOff val="40000"/>
-                  </a:schemeClr>
-                </a:solidFill>
-              </a:rPr>
-              <a:t>.</a:t>
-            </a:r>
-          </a:p>
-          <a:p>
-            <a:endParaRPr lang="en-US" dirty="0">
-              <a:solidFill>
-                <a:schemeClr val="accent6">
-                  <a:lumMod val="60000"/>
-                  <a:lumOff val="40000"/>
-                </a:schemeClr>
-              </a:solidFill>
-            </a:endParaRPr>
-          </a:p>
-          <a:p>
-            <a:endParaRPr lang="en-US" dirty="0">
-              <a:solidFill>
-                <a:schemeClr val="accent6">
-                  <a:lumMod val="60000"/>
-                  <a:lumOff val="40000"/>
-                </a:schemeClr>
-              </a:solidFill>
-            </a:endParaRPr>
-          </a:p>
-          <a:p>
-            <a:r>
-              <a:rPr lang="en-US" b="1" dirty="0">
-                <a:solidFill>
-                  <a:schemeClr val="accent6">
-                    <a:lumMod val="60000"/>
-                    <a:lumOff val="40000"/>
-                  </a:schemeClr>
-                </a:solidFill>
-              </a:rPr>
-              <a:t>Natural Language Processing (NLP)</a:t>
-            </a:r>
-            <a:r>
-              <a:rPr lang="en-US" dirty="0">
-                <a:solidFill>
-                  <a:schemeClr val="accent6">
-                    <a:lumMod val="60000"/>
-                    <a:lumOff val="40000"/>
-                  </a:schemeClr>
-                </a:solidFill>
-              </a:rPr>
-              <a:t>:</a:t>
-            </a:r>
-          </a:p>
-          <a:p>
-            <a:r>
-              <a:rPr lang="en-US" dirty="0">
-                <a:solidFill>
-                  <a:schemeClr val="accent6">
-                    <a:lumMod val="60000"/>
-                    <a:lumOff val="40000"/>
-                  </a:schemeClr>
-                </a:solidFill>
-              </a:rPr>
-              <a:t> Eigenvectors and eigenvalues are used in topic modeling and </a:t>
-            </a:r>
-            <a:r>
-              <a:rPr lang="en-US" b="1" dirty="0">
-                <a:solidFill>
-                  <a:schemeClr val="accent6">
-                    <a:lumMod val="60000"/>
-                    <a:lumOff val="40000"/>
-                  </a:schemeClr>
-                </a:solidFill>
-                <a:hlinkClick r:id="rId3">
-                  <a:extLst>
-                    <a:ext uri="{A12FA001-AC4F-418D-AE19-62706E023703}">
-                      <ahyp:hlinkClr xmlns:ahyp="http://schemas.microsoft.com/office/drawing/2018/hyperlinkcolor" val="tx"/>
-                    </a:ext>
-                  </a:extLst>
-                </a:hlinkClick>
-              </a:rPr>
-              <a:t>word embeddings</a:t>
-            </a:r>
-            <a:r>
-              <a:rPr lang="en-US" dirty="0">
-                <a:solidFill>
-                  <a:schemeClr val="accent6">
-                    <a:lumMod val="60000"/>
-                    <a:lumOff val="40000"/>
-                  </a:schemeClr>
-                </a:solidFill>
-              </a:rPr>
-              <a:t>.</a:t>
-            </a:r>
-          </a:p>
-          <a:p>
-            <a:r>
-              <a:rPr lang="en-US" dirty="0">
-                <a:solidFill>
-                  <a:schemeClr val="accent6">
-                    <a:lumMod val="60000"/>
-                    <a:lumOff val="40000"/>
-                  </a:schemeClr>
-                </a:solidFill>
-              </a:rPr>
-              <a:t>In word embeddings (like </a:t>
-            </a:r>
-            <a:r>
-              <a:rPr lang="en-US" b="1" dirty="0">
-                <a:solidFill>
-                  <a:schemeClr val="accent6">
-                    <a:lumMod val="60000"/>
-                    <a:lumOff val="40000"/>
-                  </a:schemeClr>
-                </a:solidFill>
-              </a:rPr>
-              <a:t>Word2Vec</a:t>
-            </a:r>
-            <a:r>
-              <a:rPr lang="en-US" dirty="0">
-                <a:solidFill>
-                  <a:schemeClr val="accent6">
-                    <a:lumMod val="60000"/>
-                    <a:lumOff val="40000"/>
-                  </a:schemeClr>
-                </a:solidFill>
-              </a:rPr>
-              <a:t>, </a:t>
-            </a:r>
-            <a:r>
-              <a:rPr lang="en-US" b="1" dirty="0" err="1">
-                <a:solidFill>
-                  <a:schemeClr val="accent6">
-                    <a:lumMod val="60000"/>
-                    <a:lumOff val="40000"/>
-                  </a:schemeClr>
-                </a:solidFill>
-              </a:rPr>
-              <a:t>GloVe</a:t>
-            </a:r>
-            <a:r>
-              <a:rPr lang="en-US" dirty="0">
-                <a:solidFill>
-                  <a:schemeClr val="accent6">
-                    <a:lumMod val="60000"/>
-                    <a:lumOff val="40000"/>
-                  </a:schemeClr>
-                </a:solidFill>
-              </a:rPr>
-              <a:t>):</a:t>
-            </a:r>
-          </a:p>
-          <a:p>
-            <a:pPr marL="285750" indent="-285750">
-              <a:buFont typeface="Arial" panose="020B0604020202020204" pitchFamily="34" charset="0"/>
-              <a:buChar char="•"/>
-            </a:pPr>
-            <a:r>
-              <a:rPr lang="en-US" dirty="0">
-                <a:solidFill>
-                  <a:schemeClr val="accent6">
-                    <a:lumMod val="60000"/>
-                    <a:lumOff val="40000"/>
-                  </a:schemeClr>
-                </a:solidFill>
-              </a:rPr>
-              <a:t>Eigenvalue decomposition appears when factorizing </a:t>
-            </a:r>
-            <a:r>
-              <a:rPr lang="en-US" b="1" dirty="0">
-                <a:solidFill>
-                  <a:schemeClr val="accent6">
-                    <a:lumMod val="60000"/>
-                    <a:lumOff val="40000"/>
-                  </a:schemeClr>
-                </a:solidFill>
-              </a:rPr>
-              <a:t>co-occurrence matrices</a:t>
-            </a:r>
-            <a:r>
-              <a:rPr lang="en-US" dirty="0">
-                <a:solidFill>
-                  <a:schemeClr val="accent6">
-                    <a:lumMod val="60000"/>
-                    <a:lumOff val="40000"/>
-                  </a:schemeClr>
-                </a:solidFill>
-              </a:rPr>
-              <a:t> or </a:t>
-            </a:r>
-            <a:r>
-              <a:rPr lang="en-US" b="1" dirty="0">
-                <a:solidFill>
-                  <a:schemeClr val="accent6">
-                    <a:lumMod val="60000"/>
-                    <a:lumOff val="40000"/>
-                  </a:schemeClr>
-                </a:solidFill>
-              </a:rPr>
-              <a:t>SVD</a:t>
-            </a:r>
-            <a:r>
-              <a:rPr lang="en-US" dirty="0">
-                <a:solidFill>
-                  <a:schemeClr val="accent6">
-                    <a:lumMod val="60000"/>
-                    <a:lumOff val="40000"/>
-                  </a:schemeClr>
-                </a:solidFill>
-              </a:rPr>
-              <a:t> of the word-context matrix.</a:t>
-            </a:r>
-          </a:p>
-          <a:p>
-            <a:pPr marL="285750" indent="-285750">
-              <a:buFont typeface="Arial" panose="020B0604020202020204" pitchFamily="34" charset="0"/>
-              <a:buChar char="•"/>
-            </a:pPr>
-            <a:r>
-              <a:rPr lang="en-US" dirty="0">
-                <a:solidFill>
-                  <a:schemeClr val="accent6">
-                    <a:lumMod val="60000"/>
-                    <a:lumOff val="40000"/>
-                  </a:schemeClr>
-                </a:solidFill>
-              </a:rPr>
-              <a:t>The top eigenvectors represent </a:t>
-            </a:r>
-            <a:r>
-              <a:rPr lang="en-US" b="1" dirty="0">
-                <a:solidFill>
-                  <a:schemeClr val="accent6">
-                    <a:lumMod val="60000"/>
-                    <a:lumOff val="40000"/>
-                  </a:schemeClr>
-                </a:solidFill>
-              </a:rPr>
-              <a:t>semantic directions</a:t>
-            </a:r>
-            <a:r>
-              <a:rPr lang="en-US" dirty="0">
-                <a:solidFill>
-                  <a:schemeClr val="accent6">
-                    <a:lumMod val="60000"/>
-                    <a:lumOff val="40000"/>
-                  </a:schemeClr>
-                </a:solidFill>
-              </a:rPr>
-              <a:t> in embedding space — e.g., gender, tense, country/capital relationships.</a:t>
-            </a:r>
-          </a:p>
-          <a:p>
-            <a:endParaRPr lang="en-US" dirty="0">
-              <a:solidFill>
-                <a:schemeClr val="accent6">
-                  <a:lumMod val="60000"/>
-                  <a:lumOff val="40000"/>
-                </a:schemeClr>
-              </a:solidFill>
-            </a:endParaRPr>
-          </a:p>
-          <a:p>
-            <a:endParaRPr lang="en-US" dirty="0">
-              <a:solidFill>
-                <a:schemeClr val="accent6">
-                  <a:lumMod val="60000"/>
-                  <a:lumOff val="40000"/>
-                </a:schemeClr>
-              </a:solidFill>
-            </a:endParaRPr>
-          </a:p>
-          <a:p>
-            <a:r>
-              <a:rPr lang="en-US" b="1" dirty="0">
-                <a:solidFill>
-                  <a:schemeClr val="accent6">
-                    <a:lumMod val="60000"/>
-                    <a:lumOff val="40000"/>
-                  </a:schemeClr>
-                </a:solidFill>
-              </a:rPr>
-              <a:t>Recommendation Systems</a:t>
-            </a:r>
-            <a:r>
-              <a:rPr lang="en-US" dirty="0">
-                <a:solidFill>
-                  <a:schemeClr val="accent6">
-                    <a:lumMod val="60000"/>
-                    <a:lumOff val="40000"/>
-                  </a:schemeClr>
-                </a:solidFill>
-              </a:rPr>
-              <a:t>: </a:t>
-            </a:r>
-          </a:p>
-          <a:p>
-            <a:r>
-              <a:rPr lang="en-US" dirty="0">
-                <a:solidFill>
-                  <a:schemeClr val="accent6">
-                    <a:lumMod val="60000"/>
-                    <a:lumOff val="40000"/>
-                  </a:schemeClr>
-                </a:solidFill>
-              </a:rPr>
-              <a:t>As in collaborative and content-based filtering, where dimensionality reduction can improve the accuracy of the </a:t>
-            </a:r>
-            <a:r>
-              <a:rPr lang="en-US" b="1" dirty="0">
-                <a:solidFill>
-                  <a:schemeClr val="accent6">
-                    <a:lumMod val="60000"/>
-                    <a:lumOff val="40000"/>
-                  </a:schemeClr>
-                </a:solidFill>
-                <a:hlinkClick r:id="rId4">
-                  <a:extLst>
-                    <a:ext uri="{A12FA001-AC4F-418D-AE19-62706E023703}">
-                      <ahyp:hlinkClr xmlns:ahyp="http://schemas.microsoft.com/office/drawing/2018/hyperlinkcolor" val="tx"/>
-                    </a:ext>
-                  </a:extLst>
-                </a:hlinkClick>
-              </a:rPr>
-              <a:t>recommendation systems</a:t>
-            </a:r>
-            <a:r>
-              <a:rPr lang="en-US" dirty="0">
-                <a:solidFill>
-                  <a:schemeClr val="accent6">
-                    <a:lumMod val="60000"/>
-                    <a:lumOff val="40000"/>
-                  </a:schemeClr>
-                </a:solidFill>
-              </a:rPr>
-              <a:t>.</a:t>
+            <a:r>
+              <a:rPr lang="en-US" sz="2400" dirty="0">
+                <a:solidFill>
+                  <a:schemeClr val="accent6">
+                    <a:lumMod val="60000"/>
+                    <a:lumOff val="40000"/>
+                  </a:schemeClr>
+                </a:solidFill>
+              </a:rPr>
+              <a:t>When studying relationships among variables (like in feature selection or clustering), eigenvectors of the covariance matrix show the </a:t>
+            </a:r>
+            <a:r>
+              <a:rPr lang="en-US" sz="2400" b="1" dirty="0">
+                <a:solidFill>
+                  <a:schemeClr val="accent6">
+                    <a:lumMod val="60000"/>
+                    <a:lumOff val="40000"/>
+                  </a:schemeClr>
+                </a:solidFill>
+              </a:rPr>
+              <a:t>uncorrelated directions</a:t>
+            </a:r>
+            <a:r>
+              <a:rPr lang="en-US" sz="2400" dirty="0">
+                <a:solidFill>
+                  <a:schemeClr val="accent6">
+                    <a:lumMod val="60000"/>
+                    <a:lumOff val="40000"/>
+                  </a:schemeClr>
+                </a:solidFill>
+              </a:rPr>
+              <a:t> (orthogonal features).</a:t>
             </a:r>
           </a:p>
         </p:txBody>
@@ -6930,7 +7219,474 @@
 </p:sld>
 </file>
 
-<file path=ppt/slides/slide7.xml><?xml version="1.0" encoding="utf-8"?>
+<file path=ppt/slides/slide8.xml><?xml version="1.0" encoding="utf-8"?>
+<p:sld xmlns:a="http://schemas.openxmlformats.org/drawingml/2006/main" xmlns:r="http://schemas.openxmlformats.org/officeDocument/2006/relationships" xmlns:p="http://schemas.openxmlformats.org/presentationml/2006/main">
+  <p:cSld>
+    <p:spTree>
+      <p:nvGrpSpPr>
+        <p:cNvPr id="1" name="">
+          <a:extLst>
+            <a:ext uri="{FF2B5EF4-FFF2-40B4-BE49-F238E27FC236}">
+              <a16:creationId xmlns:a16="http://schemas.microsoft.com/office/drawing/2014/main" id="{6CC88683-71B0-F6A3-E921-639FC572B65E}"/>
+            </a:ext>
+          </a:extLst>
+        </p:cNvPr>
+        <p:cNvGrpSpPr/>
+        <p:nvPr/>
+      </p:nvGrpSpPr>
+      <p:grpSpPr>
+        <a:xfrm>
+          <a:off x="0" y="0"/>
+          <a:ext cx="0" cy="0"/>
+          <a:chOff x="0" y="0"/>
+          <a:chExt cx="0" cy="0"/>
+        </a:xfrm>
+      </p:grpSpPr>
+      <p:sp>
+        <p:nvSpPr>
+          <p:cNvPr id="4" name="Title 1">
+            <a:extLst>
+              <a:ext uri="{FF2B5EF4-FFF2-40B4-BE49-F238E27FC236}">
+                <a16:creationId xmlns:a16="http://schemas.microsoft.com/office/drawing/2014/main" id="{EB433F9F-9589-B79C-7F95-15EE5119BC9F}"/>
+              </a:ext>
+            </a:extLst>
+          </p:cNvPr>
+          <p:cNvSpPr>
+            <a:spLocks noGrp="1"/>
+          </p:cNvSpPr>
+          <p:nvPr>
+            <p:ph type="title"/>
+          </p:nvPr>
+        </p:nvSpPr>
+        <p:spPr>
+          <a:xfrm>
+            <a:off x="838200" y="160938"/>
+            <a:ext cx="10515600" cy="345089"/>
+          </a:xfrm>
+        </p:spPr>
+        <p:txBody>
+          <a:bodyPr>
+            <a:normAutofit fontScale="90000"/>
+          </a:bodyPr>
+          <a:lstStyle/>
+          <a:p>
+            <a:r>
+              <a:rPr lang="en-US" dirty="0"/>
+              <a:t>Eigen value and E. vector (Application)</a:t>
+            </a:r>
+            <a:endParaRPr lang="en-IN" dirty="0"/>
+          </a:p>
+        </p:txBody>
+      </p:sp>
+      <p:sp>
+        <p:nvSpPr>
+          <p:cNvPr id="7" name="TextBox 6">
+            <a:extLst>
+              <a:ext uri="{FF2B5EF4-FFF2-40B4-BE49-F238E27FC236}">
+                <a16:creationId xmlns:a16="http://schemas.microsoft.com/office/drawing/2014/main" id="{0A19D040-5337-C683-4A8A-E4589AC6ABCE}"/>
+              </a:ext>
+            </a:extLst>
+          </p:cNvPr>
+          <p:cNvSpPr txBox="1"/>
+          <p:nvPr/>
+        </p:nvSpPr>
+        <p:spPr>
+          <a:xfrm>
+            <a:off x="285750" y="671275"/>
+            <a:ext cx="11677649" cy="6001643"/>
+          </a:xfrm>
+          <a:prstGeom prst="rect">
+            <a:avLst/>
+          </a:prstGeom>
+          <a:noFill/>
+        </p:spPr>
+        <p:txBody>
+          <a:bodyPr wrap="square">
+            <a:spAutoFit/>
+          </a:bodyPr>
+          <a:lstStyle/>
+          <a:p>
+            <a:r>
+              <a:rPr lang="en-US" sz="2400" b="1" dirty="0">
+                <a:solidFill>
+                  <a:schemeClr val="accent6">
+                    <a:lumMod val="60000"/>
+                    <a:lumOff val="40000"/>
+                  </a:schemeClr>
+                </a:solidFill>
+              </a:rPr>
+              <a:t>Image Processing</a:t>
+            </a:r>
+            <a:r>
+              <a:rPr lang="en-US" sz="2400" dirty="0">
+                <a:solidFill>
+                  <a:schemeClr val="accent6">
+                    <a:lumMod val="60000"/>
+                    <a:lumOff val="40000"/>
+                  </a:schemeClr>
+                </a:solidFill>
+              </a:rPr>
+              <a:t>:</a:t>
+            </a:r>
+          </a:p>
+          <a:p>
+            <a:r>
+              <a:rPr lang="en-US" sz="2400" dirty="0">
+                <a:solidFill>
+                  <a:schemeClr val="accent6">
+                    <a:lumMod val="60000"/>
+                    <a:lumOff val="40000"/>
+                  </a:schemeClr>
+                </a:solidFill>
+              </a:rPr>
+              <a:t>They are used in facial recognition and image classification.</a:t>
+            </a:r>
+          </a:p>
+          <a:p>
+            <a:endParaRPr lang="en-US" sz="2400" dirty="0">
+              <a:solidFill>
+                <a:schemeClr val="accent6">
+                  <a:lumMod val="60000"/>
+                  <a:lumOff val="40000"/>
+                </a:schemeClr>
+              </a:solidFill>
+            </a:endParaRPr>
+          </a:p>
+          <a:p>
+            <a:endParaRPr lang="en-US" sz="2400" dirty="0">
+              <a:solidFill>
+                <a:schemeClr val="accent6">
+                  <a:lumMod val="60000"/>
+                  <a:lumOff val="40000"/>
+                </a:schemeClr>
+              </a:solidFill>
+            </a:endParaRPr>
+          </a:p>
+          <a:p>
+            <a:r>
+              <a:rPr lang="en-US" sz="2400" b="1" dirty="0">
+                <a:solidFill>
+                  <a:schemeClr val="accent6">
+                    <a:lumMod val="60000"/>
+                    <a:lumOff val="40000"/>
+                  </a:schemeClr>
+                </a:solidFill>
+              </a:rPr>
+              <a:t>Natural Language Processing (NLP)</a:t>
+            </a:r>
+            <a:r>
+              <a:rPr lang="en-US" sz="2400" dirty="0">
+                <a:solidFill>
+                  <a:schemeClr val="accent6">
+                    <a:lumMod val="60000"/>
+                    <a:lumOff val="40000"/>
+                  </a:schemeClr>
+                </a:solidFill>
+              </a:rPr>
+              <a:t>:</a:t>
+            </a:r>
+          </a:p>
+          <a:p>
+            <a:r>
+              <a:rPr lang="en-US" sz="2400" dirty="0">
+                <a:solidFill>
+                  <a:schemeClr val="accent6">
+                    <a:lumMod val="60000"/>
+                    <a:lumOff val="40000"/>
+                  </a:schemeClr>
+                </a:solidFill>
+              </a:rPr>
+              <a:t> Eigenvectors and eigenvalues are used in topic modeling and </a:t>
+            </a:r>
+            <a:r>
+              <a:rPr lang="en-US" sz="2400" b="1" dirty="0">
+                <a:solidFill>
+                  <a:schemeClr val="accent6">
+                    <a:lumMod val="60000"/>
+                    <a:lumOff val="40000"/>
+                  </a:schemeClr>
+                </a:solidFill>
+                <a:hlinkClick r:id="rId2">
+                  <a:extLst>
+                    <a:ext uri="{A12FA001-AC4F-418D-AE19-62706E023703}">
+                      <ahyp:hlinkClr xmlns:ahyp="http://schemas.microsoft.com/office/drawing/2018/hyperlinkcolor" val="tx"/>
+                    </a:ext>
+                  </a:extLst>
+                </a:hlinkClick>
+              </a:rPr>
+              <a:t>word embeddings</a:t>
+            </a:r>
+            <a:r>
+              <a:rPr lang="en-US" sz="2400" dirty="0">
+                <a:solidFill>
+                  <a:schemeClr val="accent6">
+                    <a:lumMod val="60000"/>
+                    <a:lumOff val="40000"/>
+                  </a:schemeClr>
+                </a:solidFill>
+              </a:rPr>
+              <a:t>.</a:t>
+            </a:r>
+          </a:p>
+          <a:p>
+            <a:r>
+              <a:rPr lang="en-US" sz="2400" dirty="0">
+                <a:solidFill>
+                  <a:schemeClr val="accent6">
+                    <a:lumMod val="60000"/>
+                    <a:lumOff val="40000"/>
+                  </a:schemeClr>
+                </a:solidFill>
+              </a:rPr>
+              <a:t>In word embeddings (like </a:t>
+            </a:r>
+            <a:r>
+              <a:rPr lang="en-US" sz="2400" b="1" dirty="0">
+                <a:solidFill>
+                  <a:schemeClr val="accent6">
+                    <a:lumMod val="60000"/>
+                    <a:lumOff val="40000"/>
+                  </a:schemeClr>
+                </a:solidFill>
+              </a:rPr>
+              <a:t>Word2Vec</a:t>
+            </a:r>
+            <a:r>
+              <a:rPr lang="en-US" sz="2400" dirty="0">
+                <a:solidFill>
+                  <a:schemeClr val="accent6">
+                    <a:lumMod val="60000"/>
+                    <a:lumOff val="40000"/>
+                  </a:schemeClr>
+                </a:solidFill>
+              </a:rPr>
+              <a:t>, </a:t>
+            </a:r>
+            <a:r>
+              <a:rPr lang="en-US" sz="2400" b="1" dirty="0" err="1">
+                <a:solidFill>
+                  <a:schemeClr val="accent6">
+                    <a:lumMod val="60000"/>
+                    <a:lumOff val="40000"/>
+                  </a:schemeClr>
+                </a:solidFill>
+              </a:rPr>
+              <a:t>GloVe</a:t>
+            </a:r>
+            <a:r>
+              <a:rPr lang="en-US" sz="2400" dirty="0">
+                <a:solidFill>
+                  <a:schemeClr val="accent6">
+                    <a:lumMod val="60000"/>
+                    <a:lumOff val="40000"/>
+                  </a:schemeClr>
+                </a:solidFill>
+              </a:rPr>
+              <a:t>):</a:t>
+            </a:r>
+          </a:p>
+          <a:p>
+            <a:pPr marL="285750" indent="-285750">
+              <a:buFont typeface="Arial" panose="020B0604020202020204" pitchFamily="34" charset="0"/>
+              <a:buChar char="•"/>
+            </a:pPr>
+            <a:r>
+              <a:rPr lang="en-US" sz="2400" dirty="0">
+                <a:solidFill>
+                  <a:schemeClr val="accent6">
+                    <a:lumMod val="60000"/>
+                    <a:lumOff val="40000"/>
+                  </a:schemeClr>
+                </a:solidFill>
+              </a:rPr>
+              <a:t>Eigenvalue decomposition appears when factorizing </a:t>
+            </a:r>
+            <a:r>
+              <a:rPr lang="en-US" sz="2400" b="1" dirty="0">
+                <a:solidFill>
+                  <a:schemeClr val="accent6">
+                    <a:lumMod val="60000"/>
+                    <a:lumOff val="40000"/>
+                  </a:schemeClr>
+                </a:solidFill>
+              </a:rPr>
+              <a:t>co-occurrence matrices</a:t>
+            </a:r>
+            <a:r>
+              <a:rPr lang="en-US" sz="2400" dirty="0">
+                <a:solidFill>
+                  <a:schemeClr val="accent6">
+                    <a:lumMod val="60000"/>
+                    <a:lumOff val="40000"/>
+                  </a:schemeClr>
+                </a:solidFill>
+              </a:rPr>
+              <a:t> or </a:t>
+            </a:r>
+            <a:r>
+              <a:rPr lang="en-US" sz="2400" b="1" dirty="0">
+                <a:solidFill>
+                  <a:schemeClr val="accent6">
+                    <a:lumMod val="60000"/>
+                    <a:lumOff val="40000"/>
+                  </a:schemeClr>
+                </a:solidFill>
+              </a:rPr>
+              <a:t>SVD</a:t>
+            </a:r>
+            <a:r>
+              <a:rPr lang="en-US" sz="2400" dirty="0">
+                <a:solidFill>
+                  <a:schemeClr val="accent6">
+                    <a:lumMod val="60000"/>
+                    <a:lumOff val="40000"/>
+                  </a:schemeClr>
+                </a:solidFill>
+              </a:rPr>
+              <a:t> of the word-context matrix.</a:t>
+            </a:r>
+          </a:p>
+          <a:p>
+            <a:pPr marL="285750" indent="-285750">
+              <a:buFont typeface="Arial" panose="020B0604020202020204" pitchFamily="34" charset="0"/>
+              <a:buChar char="•"/>
+            </a:pPr>
+            <a:r>
+              <a:rPr lang="en-US" sz="2400" dirty="0">
+                <a:solidFill>
+                  <a:schemeClr val="accent6">
+                    <a:lumMod val="60000"/>
+                    <a:lumOff val="40000"/>
+                  </a:schemeClr>
+                </a:solidFill>
+              </a:rPr>
+              <a:t>The top eigenvectors represent </a:t>
+            </a:r>
+            <a:r>
+              <a:rPr lang="en-US" sz="2400" b="1" dirty="0">
+                <a:solidFill>
+                  <a:schemeClr val="accent6">
+                    <a:lumMod val="60000"/>
+                    <a:lumOff val="40000"/>
+                  </a:schemeClr>
+                </a:solidFill>
+              </a:rPr>
+              <a:t>semantic directions</a:t>
+            </a:r>
+            <a:r>
+              <a:rPr lang="en-US" sz="2400" dirty="0">
+                <a:solidFill>
+                  <a:schemeClr val="accent6">
+                    <a:lumMod val="60000"/>
+                    <a:lumOff val="40000"/>
+                  </a:schemeClr>
+                </a:solidFill>
+              </a:rPr>
+              <a:t> in embedding space — e.g., gender, tense, country/capital relationships.</a:t>
+            </a:r>
+          </a:p>
+          <a:p>
+            <a:endParaRPr lang="en-US" sz="2400" dirty="0">
+              <a:solidFill>
+                <a:schemeClr val="accent6">
+                  <a:lumMod val="60000"/>
+                  <a:lumOff val="40000"/>
+                </a:schemeClr>
+              </a:solidFill>
+            </a:endParaRPr>
+          </a:p>
+          <a:p>
+            <a:endParaRPr lang="en-US" sz="2400" dirty="0">
+              <a:solidFill>
+                <a:schemeClr val="accent6">
+                  <a:lumMod val="60000"/>
+                  <a:lumOff val="40000"/>
+                </a:schemeClr>
+              </a:solidFill>
+            </a:endParaRPr>
+          </a:p>
+          <a:p>
+            <a:r>
+              <a:rPr lang="en-US" sz="2400" b="1" dirty="0">
+                <a:solidFill>
+                  <a:schemeClr val="accent6">
+                    <a:lumMod val="60000"/>
+                    <a:lumOff val="40000"/>
+                  </a:schemeClr>
+                </a:solidFill>
+              </a:rPr>
+              <a:t>Recommendation Systems</a:t>
+            </a:r>
+            <a:r>
+              <a:rPr lang="en-US" sz="2400" dirty="0">
+                <a:solidFill>
+                  <a:schemeClr val="accent6">
+                    <a:lumMod val="60000"/>
+                    <a:lumOff val="40000"/>
+                  </a:schemeClr>
+                </a:solidFill>
+              </a:rPr>
+              <a:t>: </a:t>
+            </a:r>
+          </a:p>
+          <a:p>
+            <a:r>
+              <a:rPr lang="en-US" sz="2400" dirty="0">
+                <a:solidFill>
+                  <a:schemeClr val="accent6">
+                    <a:lumMod val="60000"/>
+                    <a:lumOff val="40000"/>
+                  </a:schemeClr>
+                </a:solidFill>
+              </a:rPr>
+              <a:t>As in collaborative and content-based filtering, where dimensionality reduction can improve the accuracy of the </a:t>
+            </a:r>
+            <a:r>
+              <a:rPr lang="en-US" sz="2400" b="1" dirty="0">
+                <a:solidFill>
+                  <a:schemeClr val="accent6">
+                    <a:lumMod val="60000"/>
+                    <a:lumOff val="40000"/>
+                  </a:schemeClr>
+                </a:solidFill>
+                <a:hlinkClick r:id="rId3">
+                  <a:extLst>
+                    <a:ext uri="{A12FA001-AC4F-418D-AE19-62706E023703}">
+                      <ahyp:hlinkClr xmlns:ahyp="http://schemas.microsoft.com/office/drawing/2018/hyperlinkcolor" val="tx"/>
+                    </a:ext>
+                  </a:extLst>
+                </a:hlinkClick>
+              </a:rPr>
+              <a:t>recommendation systems</a:t>
+            </a:r>
+            <a:r>
+              <a:rPr lang="en-US" sz="2400" dirty="0">
+                <a:solidFill>
+                  <a:schemeClr val="accent6">
+                    <a:lumMod val="60000"/>
+                    <a:lumOff val="40000"/>
+                  </a:schemeClr>
+                </a:solidFill>
+              </a:rPr>
+              <a:t>.</a:t>
+            </a:r>
+          </a:p>
+        </p:txBody>
+      </p:sp>
+    </p:spTree>
+    <p:extLst>
+      <p:ext uri="{BB962C8B-B14F-4D97-AF65-F5344CB8AC3E}">
+        <p14:creationId xmlns:p14="http://schemas.microsoft.com/office/powerpoint/2010/main" val="3987421809"/>
+      </p:ext>
+    </p:extLst>
+  </p:cSld>
+  <p:clrMapOvr>
+    <a:masterClrMapping/>
+  </p:clrMapOvr>
+</p:sld>
+</file>
+
+<file path=ppt/slides/slide9.xml><?xml version="1.0" encoding="utf-8"?>
 <p:sld xmlns:a="http://schemas.openxmlformats.org/drawingml/2006/main" xmlns:r="http://schemas.openxmlformats.org/officeDocument/2006/relationships" xmlns:p="http://schemas.openxmlformats.org/presentationml/2006/main">
   <p:cSld>
     <p:spTree>
@@ -7004,7 +7760,7 @@
         <p:spPr>
           <a:xfrm>
             <a:off x="695325" y="671275"/>
-            <a:ext cx="11410950" cy="5632311"/>
+            <a:ext cx="11410950" cy="4154984"/>
           </a:xfrm>
           <a:prstGeom prst="rect">
             <a:avLst/>
@@ -7018,7 +7774,7 @@
           <a:lstStyle/>
           <a:p>
             <a:r>
-              <a:rPr lang="en-US" b="1" dirty="0">
+              <a:rPr lang="en-US" sz="2400" b="1" dirty="0">
                 <a:solidFill>
                   <a:schemeClr val="accent6">
                     <a:lumMod val="60000"/>
@@ -7029,7 +7785,7 @@
               <a:t>Spectral Clustering</a:t>
             </a:r>
             <a:r>
-              <a:rPr lang="en-US" dirty="0">
+              <a:rPr lang="en-US" sz="2400" dirty="0">
                 <a:solidFill>
                   <a:schemeClr val="accent6">
                     <a:lumMod val="60000"/>
@@ -7042,7 +7798,7 @@
           </a:p>
           <a:p>
             <a:r>
-              <a:rPr lang="en-US" dirty="0">
+              <a:rPr lang="en-US" sz="2400" dirty="0">
                 <a:solidFill>
                   <a:schemeClr val="accent6">
                     <a:lumMod val="60000"/>
@@ -7053,7 +7809,7 @@
               <a:t>Eigenvectors and eigenvalues are also a founding component of </a:t>
             </a:r>
             <a:r>
-              <a:rPr lang="en-US" b="1" dirty="0">
+              <a:rPr lang="en-US" sz="2400" b="1" dirty="0">
                 <a:solidFill>
                   <a:schemeClr val="accent6">
                     <a:lumMod val="60000"/>
@@ -7071,7 +7827,7 @@
               <a:t>spectral clustering</a:t>
             </a:r>
             <a:r>
-              <a:rPr lang="en-US" dirty="0">
+              <a:rPr lang="en-US" sz="2400" dirty="0">
                 <a:solidFill>
                   <a:schemeClr val="accent6">
                     <a:lumMod val="60000"/>
@@ -7087,7 +7843,7 @@
               <a:buNone/>
             </a:pPr>
             <a:r>
-              <a:rPr lang="en-US" dirty="0">
+              <a:rPr lang="en-US" sz="2400" dirty="0">
                 <a:solidFill>
                   <a:schemeClr val="accent6">
                     <a:lumMod val="60000"/>
@@ -7104,7 +7860,7 @@
               <a:buChar char="•"/>
             </a:pPr>
             <a:r>
-              <a:rPr lang="en-US" dirty="0">
+              <a:rPr lang="en-US" sz="2400" dirty="0">
                 <a:solidFill>
                   <a:schemeClr val="accent6">
                     <a:lumMod val="60000"/>
@@ -7115,7 +7871,7 @@
               <a:t>You create a </a:t>
             </a:r>
             <a:r>
-              <a:rPr lang="en-US" b="1" dirty="0">
+              <a:rPr lang="en-US" sz="2400" b="1" dirty="0">
                 <a:solidFill>
                   <a:schemeClr val="accent6">
                     <a:lumMod val="60000"/>
@@ -7126,7 +7882,7 @@
               <a:t>similarity graph</a:t>
             </a:r>
             <a:r>
-              <a:rPr lang="en-US" dirty="0">
+              <a:rPr lang="en-US" sz="2400" dirty="0">
                 <a:solidFill>
                   <a:schemeClr val="accent6">
                     <a:lumMod val="60000"/>
@@ -7143,7 +7899,7 @@
               <a:buChar char="•"/>
             </a:pPr>
             <a:r>
-              <a:rPr lang="en-US" dirty="0">
+              <a:rPr lang="en-US" sz="2400" dirty="0">
                 <a:solidFill>
                   <a:schemeClr val="accent6">
                     <a:lumMod val="60000"/>
@@ -7154,7 +7910,7 @@
               <a:t>Compute the </a:t>
             </a:r>
             <a:r>
-              <a:rPr lang="en-US" b="1" dirty="0">
+              <a:rPr lang="en-US" sz="2400" b="1" dirty="0">
                 <a:solidFill>
                   <a:schemeClr val="accent6">
                     <a:lumMod val="60000"/>
@@ -7165,7 +7921,7 @@
               <a:t>graph Laplacian matrix</a:t>
             </a:r>
             <a:r>
-              <a:rPr lang="en-US" dirty="0">
+              <a:rPr lang="en-US" sz="2400" dirty="0">
                 <a:solidFill>
                   <a:schemeClr val="accent6">
                     <a:lumMod val="60000"/>
@@ -7182,7 +7938,7 @@
               <a:buChar char="•"/>
             </a:pPr>
             <a:r>
-              <a:rPr lang="en-US" dirty="0">
+              <a:rPr lang="en-US" sz="2400" dirty="0">
                 <a:solidFill>
                   <a:schemeClr val="accent6">
                     <a:lumMod val="60000"/>
@@ -7193,7 +7949,7 @@
               <a:t>Find its </a:t>
             </a:r>
             <a:r>
-              <a:rPr lang="en-US" b="1" dirty="0">
+              <a:rPr lang="en-US" sz="2400" b="1" dirty="0">
                 <a:solidFill>
                   <a:schemeClr val="accent6">
                     <a:lumMod val="60000"/>
@@ -7204,7 +7960,7 @@
               <a:t>eigenvectors</a:t>
             </a:r>
             <a:r>
-              <a:rPr lang="en-US" dirty="0">
+              <a:rPr lang="en-US" sz="2400" dirty="0">
                 <a:solidFill>
                   <a:schemeClr val="accent6">
                     <a:lumMod val="60000"/>
@@ -7215,7 +7971,7 @@
               <a:t> — they reveal the </a:t>
             </a:r>
             <a:r>
-              <a:rPr lang="en-US" b="1" dirty="0">
+              <a:rPr lang="en-US" sz="2400" b="1" dirty="0">
                 <a:solidFill>
                   <a:schemeClr val="accent6">
                     <a:lumMod val="60000"/>
@@ -7226,7 +7982,7 @@
               <a:t>underlying cluster structure</a:t>
             </a:r>
             <a:r>
-              <a:rPr lang="en-US" dirty="0">
+              <a:rPr lang="en-US" sz="2400" dirty="0">
                 <a:solidFill>
                   <a:schemeClr val="accent6">
                     <a:lumMod val="60000"/>
@@ -7243,7 +7999,7 @@
               <a:buChar char="•"/>
             </a:pPr>
             <a:r>
-              <a:rPr lang="en-US" dirty="0">
+              <a:rPr lang="en-US" sz="2400" dirty="0">
                 <a:solidFill>
                   <a:schemeClr val="accent6">
                     <a:lumMod val="60000"/>
@@ -7253,167 +8009,6 @@
               </a:rPr>
               <a:t>The smallest eigenvectors (of the Laplacian) help embed the data into a low-dimensional space where clusters are easier to separate.</a:t>
             </a:r>
-          </a:p>
-          <a:p>
-            <a:pPr marL="0" indent="0">
-              <a:buNone/>
-            </a:pPr>
-            <a:endParaRPr lang="en-US" dirty="0">
-              <a:solidFill>
-                <a:schemeClr val="accent6">
-                  <a:lumMod val="60000"/>
-                  <a:lumOff val="40000"/>
-                </a:schemeClr>
-              </a:solidFill>
-            </a:endParaRPr>
-          </a:p>
-          <a:p>
-            <a:pPr marL="0" indent="0">
-              <a:buNone/>
-            </a:pPr>
-            <a:endParaRPr lang="en-US" dirty="0">
-              <a:solidFill>
-                <a:schemeClr val="accent6">
-                  <a:lumMod val="60000"/>
-                  <a:lumOff val="40000"/>
-                </a:schemeClr>
-              </a:solidFill>
-            </a:endParaRPr>
-          </a:p>
-          <a:p>
-            <a:pPr marL="0" indent="0">
-              <a:buNone/>
-            </a:pPr>
-            <a:endParaRPr lang="en-US" dirty="0">
-              <a:solidFill>
-                <a:schemeClr val="accent6">
-                  <a:lumMod val="60000"/>
-                  <a:lumOff val="40000"/>
-                </a:schemeClr>
-              </a:solidFill>
-            </a:endParaRPr>
-          </a:p>
-          <a:p>
-            <a:pPr marL="0" indent="0">
-              <a:buNone/>
-            </a:pPr>
-            <a:endParaRPr lang="en-US" dirty="0">
-              <a:solidFill>
-                <a:schemeClr val="accent6">
-                  <a:lumMod val="60000"/>
-                  <a:lumOff val="40000"/>
-                </a:schemeClr>
-              </a:solidFill>
-            </a:endParaRPr>
-          </a:p>
-          <a:p>
-            <a:r>
-              <a:rPr lang="en-US" b="1" dirty="0">
-                <a:solidFill>
-                  <a:schemeClr val="accent6">
-                    <a:lumMod val="60000"/>
-                    <a:lumOff val="40000"/>
-                  </a:schemeClr>
-                </a:solidFill>
-              </a:rPr>
-              <a:t>Markov Chains &amp; PageRank:</a:t>
-            </a:r>
-          </a:p>
-          <a:p>
-            <a:r>
-              <a:rPr lang="en-US" dirty="0">
-                <a:solidFill>
-                  <a:schemeClr val="accent6">
-                    <a:lumMod val="60000"/>
-                    <a:lumOff val="40000"/>
-                  </a:schemeClr>
-                </a:solidFill>
-              </a:rPr>
-              <a:t>In Google’s </a:t>
-            </a:r>
-            <a:r>
-              <a:rPr lang="en-US" b="1" dirty="0">
-                <a:solidFill>
-                  <a:schemeClr val="accent6">
-                    <a:lumMod val="60000"/>
-                    <a:lumOff val="40000"/>
-                  </a:schemeClr>
-                </a:solidFill>
-              </a:rPr>
-              <a:t>PageRank algorithm</a:t>
-            </a:r>
-            <a:r>
-              <a:rPr lang="en-US" dirty="0">
-                <a:solidFill>
-                  <a:schemeClr val="accent6">
-                    <a:lumMod val="60000"/>
-                    <a:lumOff val="40000"/>
-                  </a:schemeClr>
-                </a:solidFill>
-              </a:rPr>
-              <a:t>, the steady-state probabilities (importance of web pages) come from the </a:t>
-            </a:r>
-            <a:r>
-              <a:rPr lang="en-US" b="1" dirty="0">
-                <a:solidFill>
-                  <a:schemeClr val="accent6">
-                    <a:lumMod val="60000"/>
-                    <a:lumOff val="40000"/>
-                  </a:schemeClr>
-                </a:solidFill>
-              </a:rPr>
-              <a:t>dominant eigenvector</a:t>
-            </a:r>
-            <a:r>
-              <a:rPr lang="en-US" dirty="0">
-                <a:solidFill>
-                  <a:schemeClr val="accent6">
-                    <a:lumMod val="60000"/>
-                    <a:lumOff val="40000"/>
-                  </a:schemeClr>
-                </a:solidFill>
-              </a:rPr>
-              <a:t> of a transition matrix.</a:t>
-            </a:r>
-          </a:p>
-          <a:p>
-            <a:r>
-              <a:rPr lang="en-US" dirty="0">
-                <a:solidFill>
-                  <a:schemeClr val="accent6">
-                    <a:lumMod val="60000"/>
-                    <a:lumOff val="40000"/>
-                  </a:schemeClr>
-                </a:solidFill>
-              </a:rPr>
-              <a:t>Eigenvalue = 1 corresponds to the stationary distribution.</a:t>
-            </a:r>
-          </a:p>
-          <a:p>
-            <a:pPr marL="0" indent="0">
-              <a:buNone/>
-            </a:pPr>
-            <a:endParaRPr lang="en-US" dirty="0">
-              <a:solidFill>
-                <a:schemeClr val="accent6">
-                  <a:lumMod val="60000"/>
-                  <a:lumOff val="40000"/>
-                </a:schemeClr>
-              </a:solidFill>
-            </a:endParaRPr>
-          </a:p>
-          <a:p>
-            <a:pPr marL="0" indent="0">
-              <a:buNone/>
-            </a:pPr>
-            <a:endParaRPr lang="en-US" dirty="0">
-              <a:solidFill>
-                <a:schemeClr val="accent6">
-                  <a:lumMod val="60000"/>
-                  <a:lumOff val="40000"/>
-                </a:schemeClr>
-              </a:solidFill>
-            </a:endParaRPr>
           </a:p>
         </p:txBody>
       </p:sp>
@@ -7421,323 +8016,6 @@
     <p:extLst>
       <p:ext uri="{BB962C8B-B14F-4D97-AF65-F5344CB8AC3E}">
         <p14:creationId xmlns:p14="http://schemas.microsoft.com/office/powerpoint/2010/main" val="1818073430"/>
-      </p:ext>
-    </p:extLst>
-  </p:cSld>
-  <p:clrMapOvr>
-    <a:masterClrMapping/>
-  </p:clrMapOvr>
-</p:sld>
-</file>
-
-<file path=ppt/slides/slide8.xml><?xml version="1.0" encoding="utf-8"?>
-<p:sld xmlns:a="http://schemas.openxmlformats.org/drawingml/2006/main" xmlns:r="http://schemas.openxmlformats.org/officeDocument/2006/relationships" xmlns:p="http://schemas.openxmlformats.org/presentationml/2006/main">
-  <p:cSld>
-    <p:spTree>
-      <p:nvGrpSpPr>
-        <p:cNvPr id="1" name="">
-          <a:extLst>
-            <a:ext uri="{FF2B5EF4-FFF2-40B4-BE49-F238E27FC236}">
-              <a16:creationId xmlns:a16="http://schemas.microsoft.com/office/drawing/2014/main" id="{8CEA1B8B-56E2-9F59-6314-94D0435E8E64}"/>
-            </a:ext>
-          </a:extLst>
-        </p:cNvPr>
-        <p:cNvGrpSpPr/>
-        <p:nvPr/>
-      </p:nvGrpSpPr>
-      <p:grpSpPr>
-        <a:xfrm>
-          <a:off x="0" y="0"/>
-          <a:ext cx="0" cy="0"/>
-          <a:chOff x="0" y="0"/>
-          <a:chExt cx="0" cy="0"/>
-        </a:xfrm>
-      </p:grpSpPr>
-      <p:sp>
-        <p:nvSpPr>
-          <p:cNvPr id="4" name="Title 1">
-            <a:extLst>
-              <a:ext uri="{FF2B5EF4-FFF2-40B4-BE49-F238E27FC236}">
-                <a16:creationId xmlns:a16="http://schemas.microsoft.com/office/drawing/2014/main" id="{8BC4C1F8-DA9F-C8D2-E04D-0F20B22FCD53}"/>
-              </a:ext>
-            </a:extLst>
-          </p:cNvPr>
-          <p:cNvSpPr>
-            <a:spLocks noGrp="1"/>
-          </p:cNvSpPr>
-          <p:nvPr>
-            <p:ph type="title"/>
-          </p:nvPr>
-        </p:nvSpPr>
-        <p:spPr>
-          <a:xfrm>
-            <a:off x="838200" y="160938"/>
-            <a:ext cx="10515600" cy="345089"/>
-          </a:xfrm>
-        </p:spPr>
-        <p:txBody>
-          <a:bodyPr>
-            <a:normAutofit fontScale="90000"/>
-          </a:bodyPr>
-          <a:lstStyle/>
-          <a:p>
-            <a:r>
-              <a:rPr lang="en-US" dirty="0"/>
-              <a:t>Eigen value and E. vector (Application)</a:t>
-            </a:r>
-            <a:endParaRPr lang="en-IN" dirty="0"/>
-          </a:p>
-        </p:txBody>
-      </p:sp>
-      <p:sp>
-        <p:nvSpPr>
-          <p:cNvPr id="7" name="TextBox 6">
-            <a:extLst>
-              <a:ext uri="{FF2B5EF4-FFF2-40B4-BE49-F238E27FC236}">
-                <a16:creationId xmlns:a16="http://schemas.microsoft.com/office/drawing/2014/main" id="{FDA92F45-186A-4B34-39D5-C6F23D033427}"/>
-              </a:ext>
-            </a:extLst>
-          </p:cNvPr>
-          <p:cNvSpPr txBox="1"/>
-          <p:nvPr/>
-        </p:nvSpPr>
-        <p:spPr>
-          <a:xfrm>
-            <a:off x="695325" y="671275"/>
-            <a:ext cx="11239500" cy="2308324"/>
-          </a:xfrm>
-          <a:prstGeom prst="rect">
-            <a:avLst/>
-          </a:prstGeom>
-          <a:noFill/>
-        </p:spPr>
-        <p:txBody>
-          <a:bodyPr wrap="square">
-            <a:spAutoFit/>
-          </a:bodyPr>
-          <a:lstStyle/>
-          <a:p>
-            <a:r>
-              <a:rPr lang="en-US" b="1" dirty="0">
-                <a:solidFill>
-                  <a:schemeClr val="accent6">
-                    <a:lumMod val="60000"/>
-                    <a:lumOff val="40000"/>
-                  </a:schemeClr>
-                </a:solidFill>
-              </a:rPr>
-              <a:t>Neural Networks &amp; Optimization:</a:t>
-            </a:r>
-          </a:p>
-          <a:p>
-            <a:r>
-              <a:rPr lang="en-US" b="1" dirty="0">
-                <a:solidFill>
-                  <a:schemeClr val="accent6">
-                    <a:lumMod val="60000"/>
-                    <a:lumOff val="40000"/>
-                  </a:schemeClr>
-                </a:solidFill>
-              </a:rPr>
-              <a:t>Hessian matrix</a:t>
-            </a:r>
-            <a:r>
-              <a:rPr lang="en-US" dirty="0">
-                <a:solidFill>
-                  <a:schemeClr val="accent6">
-                    <a:lumMod val="60000"/>
-                    <a:lumOff val="40000"/>
-                  </a:schemeClr>
-                </a:solidFill>
-              </a:rPr>
-              <a:t> (second derivative of loss function) has eigenvalues/eigenvectors that tell you:</a:t>
-            </a:r>
-          </a:p>
-          <a:p>
-            <a:pPr lvl="1"/>
-            <a:r>
-              <a:rPr lang="en-US" dirty="0">
-                <a:solidFill>
-                  <a:schemeClr val="accent6">
-                    <a:lumMod val="60000"/>
-                    <a:lumOff val="40000"/>
-                  </a:schemeClr>
-                </a:solidFill>
-              </a:rPr>
-              <a:t>Eigenvectors → directions in parameter space</a:t>
-            </a:r>
-          </a:p>
-          <a:p>
-            <a:pPr lvl="1"/>
-            <a:r>
-              <a:rPr lang="en-US" dirty="0">
-                <a:solidFill>
-                  <a:schemeClr val="accent6">
-                    <a:lumMod val="60000"/>
-                    <a:lumOff val="40000"/>
-                  </a:schemeClr>
-                </a:solidFill>
-              </a:rPr>
-              <a:t>Eigenvalues → curvature (how steep/flat the loss surface is)</a:t>
-            </a:r>
-          </a:p>
-          <a:p>
-            <a:r>
-              <a:rPr lang="en-US" dirty="0">
-                <a:solidFill>
-                  <a:schemeClr val="accent6">
-                    <a:lumMod val="60000"/>
-                    <a:lumOff val="40000"/>
-                  </a:schemeClr>
-                </a:solidFill>
-              </a:rPr>
-              <a:t>Used in understanding:</a:t>
-            </a:r>
-          </a:p>
-          <a:p>
-            <a:pPr lvl="1"/>
-            <a:r>
-              <a:rPr lang="en-US" b="1" dirty="0">
-                <a:solidFill>
-                  <a:schemeClr val="accent6">
-                    <a:lumMod val="60000"/>
-                    <a:lumOff val="40000"/>
-                  </a:schemeClr>
-                </a:solidFill>
-              </a:rPr>
-              <a:t>Convergence speed</a:t>
-            </a:r>
-            <a:endParaRPr lang="en-US" dirty="0">
-              <a:solidFill>
-                <a:schemeClr val="accent6">
-                  <a:lumMod val="60000"/>
-                  <a:lumOff val="40000"/>
-                </a:schemeClr>
-              </a:solidFill>
-            </a:endParaRPr>
-          </a:p>
-          <a:p>
-            <a:pPr lvl="1"/>
-            <a:r>
-              <a:rPr lang="en-US" b="1" dirty="0">
-                <a:solidFill>
-                  <a:schemeClr val="accent6">
-                    <a:lumMod val="60000"/>
-                    <a:lumOff val="40000"/>
-                  </a:schemeClr>
-                </a:solidFill>
-              </a:rPr>
-              <a:t>Stability of gradient descent</a:t>
-            </a:r>
-            <a:endParaRPr lang="en-US" dirty="0">
-              <a:solidFill>
-                <a:schemeClr val="accent6">
-                  <a:lumMod val="60000"/>
-                  <a:lumOff val="40000"/>
-                </a:schemeClr>
-              </a:solidFill>
-            </a:endParaRPr>
-          </a:p>
-          <a:p>
-            <a:pPr lvl="1"/>
-            <a:r>
-              <a:rPr lang="en-US" b="1" dirty="0">
-                <a:solidFill>
-                  <a:schemeClr val="accent6">
-                    <a:lumMod val="60000"/>
-                    <a:lumOff val="40000"/>
-                  </a:schemeClr>
-                </a:solidFill>
-              </a:rPr>
-              <a:t>Flat minima vs sharp minima</a:t>
-            </a:r>
-            <a:endParaRPr lang="en-US" dirty="0">
-              <a:solidFill>
-                <a:schemeClr val="accent6">
-                  <a:lumMod val="60000"/>
-                  <a:lumOff val="40000"/>
-                </a:schemeClr>
-              </a:solidFill>
-            </a:endParaRPr>
-          </a:p>
-        </p:txBody>
-      </p:sp>
-    </p:spTree>
-    <p:extLst>
-      <p:ext uri="{BB962C8B-B14F-4D97-AF65-F5344CB8AC3E}">
-        <p14:creationId xmlns:p14="http://schemas.microsoft.com/office/powerpoint/2010/main" val="3262251411"/>
-      </p:ext>
-    </p:extLst>
-  </p:cSld>
-  <p:clrMapOvr>
-    <a:masterClrMapping/>
-  </p:clrMapOvr>
-</p:sld>
-</file>
-
-<file path=ppt/slides/slide9.xml><?xml version="1.0" encoding="utf-8"?>
-<p:sld xmlns:a="http://schemas.openxmlformats.org/drawingml/2006/main" xmlns:r="http://schemas.openxmlformats.org/officeDocument/2006/relationships" xmlns:p="http://schemas.openxmlformats.org/presentationml/2006/main">
-  <p:cSld>
-    <p:spTree>
-      <p:nvGrpSpPr>
-        <p:cNvPr id="1" name="">
-          <a:extLst>
-            <a:ext uri="{FF2B5EF4-FFF2-40B4-BE49-F238E27FC236}">
-              <a16:creationId xmlns:a16="http://schemas.microsoft.com/office/drawing/2014/main" id="{752D0FEC-425B-E8D9-ADB9-BC9BEF8978E5}"/>
-            </a:ext>
-          </a:extLst>
-        </p:cNvPr>
-        <p:cNvGrpSpPr/>
-        <p:nvPr/>
-      </p:nvGrpSpPr>
-      <p:grpSpPr>
-        <a:xfrm>
-          <a:off x="0" y="0"/>
-          <a:ext cx="0" cy="0"/>
-          <a:chOff x="0" y="0"/>
-          <a:chExt cx="0" cy="0"/>
-        </a:xfrm>
-      </p:grpSpPr>
-      <p:sp>
-        <p:nvSpPr>
-          <p:cNvPr id="2" name="Title 1">
-            <a:extLst>
-              <a:ext uri="{FF2B5EF4-FFF2-40B4-BE49-F238E27FC236}">
-                <a16:creationId xmlns:a16="http://schemas.microsoft.com/office/drawing/2014/main" id="{C6B3EA16-ABB7-9CF7-571F-F4C4B379EB9A}"/>
-              </a:ext>
-            </a:extLst>
-          </p:cNvPr>
-          <p:cNvSpPr>
-            <a:spLocks noGrp="1"/>
-          </p:cNvSpPr>
-          <p:nvPr>
-            <p:ph type="title"/>
-          </p:nvPr>
-        </p:nvSpPr>
-        <p:spPr>
-          <a:xfrm>
-            <a:off x="838200" y="54229"/>
-            <a:ext cx="10515600" cy="393827"/>
-          </a:xfrm>
-        </p:spPr>
-        <p:txBody>
-          <a:bodyPr>
-            <a:normAutofit fontScale="90000"/>
-          </a:bodyPr>
-          <a:lstStyle/>
-          <a:p>
-            <a:pPr algn="ctr"/>
-            <a:r>
-              <a:rPr lang="en-US" sz="3200" b="1" dirty="0"/>
-              <a:t>STOP</a:t>
-            </a:r>
-          </a:p>
-        </p:txBody>
-      </p:sp>
-    </p:spTree>
-    <p:extLst>
-      <p:ext uri="{BB962C8B-B14F-4D97-AF65-F5344CB8AC3E}">
-        <p14:creationId xmlns:p14="http://schemas.microsoft.com/office/powerpoint/2010/main" val="1649105850"/>
       </p:ext>
     </p:extLst>
   </p:cSld>
